--- a/cours/Module TIC/Série Officielle 01-10/Cours_TIC_05_Microsoft_Excel_FR.pptx
+++ b/cours/Module TIC/Série Officielle 01-10/Cours_TIC_05_Microsoft_Excel_FR.pptx
@@ -2856,7 +2856,7 @@
           <a:solidFill>
             <a:schemeClr val="tx1"/>
           </a:solidFill>
-          <a:latin typeface="+mj-lt"/>
+          <a:latin typeface="Poppins"/>
           <a:ea typeface="+mj-ea"/>
           <a:cs typeface="+mj-cs"/>
         </a:defRPr>
@@ -2873,7 +2873,7 @@
           <a:solidFill>
             <a:schemeClr val="tx1"/>
           </a:solidFill>
-          <a:latin typeface="+mn-lt"/>
+          <a:latin typeface="Poppins"/>
           <a:ea typeface="+mn-ea"/>
           <a:cs typeface="+mn-cs"/>
         </a:defRPr>
@@ -2888,7 +2888,7 @@
           <a:solidFill>
             <a:schemeClr val="tx1"/>
           </a:solidFill>
-          <a:latin typeface="+mn-lt"/>
+          <a:latin typeface="Poppins"/>
           <a:ea typeface="+mn-ea"/>
           <a:cs typeface="+mn-cs"/>
         </a:defRPr>
@@ -2903,7 +2903,7 @@
           <a:solidFill>
             <a:schemeClr val="tx1"/>
           </a:solidFill>
-          <a:latin typeface="+mn-lt"/>
+          <a:latin typeface="Poppins"/>
           <a:ea typeface="+mn-ea"/>
           <a:cs typeface="+mn-cs"/>
         </a:defRPr>
@@ -2918,7 +2918,7 @@
           <a:solidFill>
             <a:schemeClr val="tx1"/>
           </a:solidFill>
-          <a:latin typeface="+mn-lt"/>
+          <a:latin typeface="Poppins"/>
           <a:ea typeface="+mn-ea"/>
           <a:cs typeface="+mn-cs"/>
         </a:defRPr>
@@ -2933,7 +2933,7 @@
           <a:solidFill>
             <a:schemeClr val="tx1"/>
           </a:solidFill>
-          <a:latin typeface="+mn-lt"/>
+          <a:latin typeface="Poppins"/>
           <a:ea typeface="+mn-ea"/>
           <a:cs typeface="+mn-cs"/>
         </a:defRPr>
@@ -2948,7 +2948,7 @@
           <a:solidFill>
             <a:schemeClr val="tx1"/>
           </a:solidFill>
-          <a:latin typeface="+mn-lt"/>
+          <a:latin typeface="Poppins"/>
           <a:ea typeface="+mn-ea"/>
           <a:cs typeface="+mn-cs"/>
         </a:defRPr>
@@ -2963,7 +2963,7 @@
           <a:solidFill>
             <a:schemeClr val="tx1"/>
           </a:solidFill>
-          <a:latin typeface="+mn-lt"/>
+          <a:latin typeface="Poppins"/>
           <a:ea typeface="+mn-ea"/>
           <a:cs typeface="+mn-cs"/>
         </a:defRPr>
@@ -2978,7 +2978,7 @@
           <a:solidFill>
             <a:schemeClr val="tx1"/>
           </a:solidFill>
-          <a:latin typeface="+mn-lt"/>
+          <a:latin typeface="Poppins"/>
           <a:ea typeface="+mn-ea"/>
           <a:cs typeface="+mn-cs"/>
         </a:defRPr>
@@ -2993,7 +2993,7 @@
           <a:solidFill>
             <a:schemeClr val="tx1"/>
           </a:solidFill>
-          <a:latin typeface="+mn-lt"/>
+          <a:latin typeface="Poppins"/>
           <a:ea typeface="+mn-ea"/>
           <a:cs typeface="+mn-cs"/>
         </a:defRPr>
@@ -3008,7 +3008,7 @@
           <a:solidFill>
             <a:schemeClr val="tx1"/>
           </a:solidFill>
-          <a:latin typeface="+mn-lt"/>
+          <a:latin typeface="Poppins"/>
           <a:ea typeface="+mn-ea"/>
           <a:cs typeface="+mn-cs"/>
         </a:defRPr>
@@ -3018,7 +3018,7 @@
           <a:solidFill>
             <a:schemeClr val="tx1"/>
           </a:solidFill>
-          <a:latin typeface="+mn-lt"/>
+          <a:latin typeface="Poppins"/>
           <a:ea typeface="+mn-ea"/>
           <a:cs typeface="+mn-cs"/>
         </a:defRPr>
@@ -3028,7 +3028,7 @@
           <a:solidFill>
             <a:schemeClr val="tx1"/>
           </a:solidFill>
-          <a:latin typeface="+mn-lt"/>
+          <a:latin typeface="Poppins"/>
           <a:ea typeface="+mn-ea"/>
           <a:cs typeface="+mn-cs"/>
         </a:defRPr>
@@ -3038,7 +3038,7 @@
           <a:solidFill>
             <a:schemeClr val="tx1"/>
           </a:solidFill>
-          <a:latin typeface="+mn-lt"/>
+          <a:latin typeface="Poppins"/>
           <a:ea typeface="+mn-ea"/>
           <a:cs typeface="+mn-cs"/>
         </a:defRPr>
@@ -3048,7 +3048,7 @@
           <a:solidFill>
             <a:schemeClr val="tx1"/>
           </a:solidFill>
-          <a:latin typeface="+mn-lt"/>
+          <a:latin typeface="Poppins"/>
           <a:ea typeface="+mn-ea"/>
           <a:cs typeface="+mn-cs"/>
         </a:defRPr>
@@ -3058,7 +3058,7 @@
           <a:solidFill>
             <a:schemeClr val="tx1"/>
           </a:solidFill>
-          <a:latin typeface="+mn-lt"/>
+          <a:latin typeface="Poppins"/>
           <a:ea typeface="+mn-ea"/>
           <a:cs typeface="+mn-cs"/>
         </a:defRPr>
@@ -3068,7 +3068,7 @@
           <a:solidFill>
             <a:schemeClr val="tx1"/>
           </a:solidFill>
-          <a:latin typeface="+mn-lt"/>
+          <a:latin typeface="Poppins"/>
           <a:ea typeface="+mn-ea"/>
           <a:cs typeface="+mn-cs"/>
         </a:defRPr>
@@ -3078,7 +3078,7 @@
           <a:solidFill>
             <a:schemeClr val="tx1"/>
           </a:solidFill>
-          <a:latin typeface="+mn-lt"/>
+          <a:latin typeface="Poppins"/>
           <a:ea typeface="+mn-ea"/>
           <a:cs typeface="+mn-cs"/>
         </a:defRPr>
@@ -3088,7 +3088,7 @@
           <a:solidFill>
             <a:schemeClr val="tx1"/>
           </a:solidFill>
-          <a:latin typeface="+mn-lt"/>
+          <a:latin typeface="Poppins"/>
           <a:ea typeface="+mn-ea"/>
           <a:cs typeface="+mn-cs"/>
         </a:defRPr>
@@ -3103,9 +3103,7 @@
   <p:cSld>
     <p:bg>
       <p:bgPr>
-        <a:solidFill>
-          <a:srgbClr val="0B3D2E"/>
-        </a:solidFill>
+        <a:solidFill>val="004A38"/&gt;</a:solidFill>
         <a:effectLst/>
       </p:bgPr>
     </p:bg>
@@ -3130,9 +3128,7 @@
           <a:prstGeom prst="rect">
             <a:avLst/>
           </a:prstGeom>
-          <a:solidFill>
-            <a:srgbClr val="146B4A"/>
-          </a:solidFill>
+          <a:solidFill>val="007A55"/&gt;</a:solidFill>
           <a:ln>
             <a:noFill/>
           </a:ln>
@@ -3174,9 +3170,7 @@
           <a:prstGeom prst="rect">
             <a:avLst/>
           </a:prstGeom>
-          <a:solidFill>
-            <a:srgbClr val="FFD700"/>
-          </a:solidFill>
+          <a:solidFill>val="F0B429"/&gt;</a:solidFill>
           <a:ln>
             <a:noFill/>
           </a:ln>
@@ -3218,9 +3212,7 @@
           <a:prstGeom prst="rect">
             <a:avLst/>
           </a:prstGeom>
-          <a:solidFill>
-            <a:srgbClr val="FFD700"/>
-          </a:solidFill>
+          <a:solidFill>val="F0B429"/&gt;</a:solidFill>
           <a:ln>
             <a:noFill/>
           </a:ln>
@@ -3262,9 +3254,7 @@
           <a:prstGeom prst="rect">
             <a:avLst/>
           </a:prstGeom>
-          <a:solidFill>
-            <a:srgbClr val="146B4A"/>
-          </a:solidFill>
+          <a:solidFill>val="007A55"/&gt;</a:solidFill>
           <a:ln>
             <a:noFill/>
           </a:ln>
@@ -3306,9 +3296,7 @@
           <a:prstGeom prst="rect">
             <a:avLst/>
           </a:prstGeom>
-          <a:solidFill>
-            <a:srgbClr val="FFD700"/>
-          </a:solidFill>
+          <a:solidFill>val="F0B429"/&gt;</a:solidFill>
           <a:ln>
             <a:noFill/>
           </a:ln>
@@ -3361,10 +3349,8 @@
             <a:pPr algn="ctr"/>
             <a:r>
               <a:rPr sz="4000" b="1" i="0">
-                <a:solidFill>
-                  <a:srgbClr val="FFD700"/>
-                </a:solidFill>
-                <a:latin typeface="Calibri"/>
+                <a:solidFill>val="F0B429"/&gt;</a:solidFill>
+                <a:latin typeface="Poppins"/>
               </a:rPr>
               <a:t>COURS TIC 05</a:t>
             </a:r>
@@ -3396,10 +3382,8 @@
             <a:pPr algn="ctr"/>
             <a:r>
               <a:rPr sz="3000" b="1" i="0">
-                <a:solidFill>
-                  <a:srgbClr val="FFFFFF"/>
-                </a:solidFill>
-                <a:latin typeface="Calibri"/>
+                <a:solidFill>val="FFFFFF"/&gt;</a:solidFill>
+                <a:latin typeface="Poppins"/>
               </a:rPr>
               <a:t>Tableur : Microsoft Excel</a:t>
             </a:r>
@@ -3420,9 +3404,7 @@
           <a:prstGeom prst="rect">
             <a:avLst/>
           </a:prstGeom>
-          <a:solidFill>
-            <a:srgbClr val="146B4A"/>
-          </a:solidFill>
+          <a:solidFill>val="007A55"/&gt;</a:solidFill>
           <a:ln>
             <a:noFill/>
           </a:ln>
@@ -3475,10 +3457,8 @@
             <a:pPr algn="ctr"/>
             <a:r>
               <a:rPr sz="1800" b="0" i="0">
-                <a:solidFill>
-                  <a:srgbClr val="BBBBBB"/>
-                </a:solidFill>
-                <a:latin typeface="Calibri"/>
+                <a:solidFill>val="9AA7B6"/&gt;</a:solidFill>
+                <a:latin typeface="Poppins"/>
               </a:rPr>
               <a:t>Dr. BELACEL Madani</a:t>
             </a:r>
@@ -3510,10 +3490,8 @@
             <a:pPr algn="ctr"/>
             <a:r>
               <a:rPr sz="1400" b="0" i="1">
-                <a:solidFill>
-                  <a:srgbClr val="BBBBBB"/>
-                </a:solidFill>
-                <a:latin typeface="Calibri"/>
+                <a:solidFill>val="9AA7B6"/&gt;</a:solidFill>
+                <a:latin typeface="Poppins"/>
               </a:rPr>
               <a:t>Année universitaire 2026-2027 / Academic Year 2026-2027</a:t>
             </a:r>
@@ -3545,10 +3523,8 @@
             <a:pPr algn="ctr"/>
             <a:r>
               <a:rPr sz="1200" b="0" i="1">
-                <a:solidFill>
-                  <a:srgbClr val="BBBBBB"/>
-                </a:solidFill>
-                <a:latin typeface="Calibri"/>
+                <a:solidFill>val="9AA7B6"/&gt;</a:solidFill>
+                <a:latin typeface="Poppins"/>
               </a:rPr>
               <a:t>Université de Mostaganem - Département Mathématiques et Informatique</a:t>
             </a:r>
@@ -3579,6 +3555,47 @@
           </a:prstGeom>
         </p:spPr>
       </p:pic>
+      <p:sp>
+        <p:nvSpPr>
+          <p:cNvPr id="990001" name="Pied de page FLE"/>
+          <p:cNvSpPr>
+            <a:spLocks noGrp="1"/>
+          </p:cNvSpPr>
+          <p:nvPr/>
+        </p:nvSpPr>
+        <p:spPr>
+          <a:xfrm>
+            <a:off x="4343400" y="-329184"/>
+            <a:ext cx="4572000" cy="274320"/>
+          </a:xfrm>
+          <a:prstGeom prst="rect">
+            <a:avLst/>
+          </a:prstGeom>
+        </p:spPr>
+        <p:txBody>
+          <a:bodyPr anchor="b"/>
+          <a:lstStyle/>
+          <a:p>
+            <a:pPr algn="r">
+              <a:defRPr sz="900">
+                <a:solidFill>
+                  <a:srgbClr val="9AA7B6"/>
+                </a:solidFill>
+                <a:latin typeface="Poppins"/>
+              </a:defRPr>
+            </a:pPr>
+            <a:r>
+              <a:rPr lang="fr-FR" sz="900">
+                <a:solidFill>
+                  <a:srgbClr val="9AA7B6"/>
+                </a:solidFill>
+                <a:latin typeface="Poppins"/>
+              </a:rPr>
+              <a:t>Université de Mostaganem — Dr. Madani BELACEL</a:t>
+            </a:r>
+          </a:p>
+        </p:txBody>
+      </p:sp>
     </p:spTree>
   </p:cSld>
   <p:clrMapOvr>
@@ -3592,9 +3609,7 @@
   <p:cSld>
     <p:bg>
       <p:bgPr>
-        <a:solidFill>
-          <a:srgbClr val="0B3D2E"/>
-        </a:solidFill>
+        <a:solidFill>val="004A38"/&gt;</a:solidFill>
         <a:effectLst/>
       </p:bgPr>
     </p:bg>
@@ -3619,9 +3634,7 @@
           <a:prstGeom prst="rect">
             <a:avLst/>
           </a:prstGeom>
-          <a:solidFill>
-            <a:srgbClr val="146B4A"/>
-          </a:solidFill>
+          <a:solidFill>val="007A55"/&gt;</a:solidFill>
           <a:ln>
             <a:noFill/>
           </a:ln>
@@ -3663,9 +3676,7 @@
           <a:prstGeom prst="rect">
             <a:avLst/>
           </a:prstGeom>
-          <a:solidFill>
-            <a:srgbClr val="FFD700"/>
-          </a:solidFill>
+          <a:solidFill>val="F0B429"/&gt;</a:solidFill>
           <a:ln>
             <a:noFill/>
           </a:ln>
@@ -3707,9 +3718,7 @@
           <a:prstGeom prst="rect">
             <a:avLst/>
           </a:prstGeom>
-          <a:solidFill>
-            <a:srgbClr val="FFD700"/>
-          </a:solidFill>
+          <a:solidFill>val="F0B429"/&gt;</a:solidFill>
           <a:ln>
             <a:noFill/>
           </a:ln>
@@ -3751,9 +3760,7 @@
           <a:prstGeom prst="rect">
             <a:avLst/>
           </a:prstGeom>
-          <a:solidFill>
-            <a:srgbClr val="146B4A"/>
-          </a:solidFill>
+          <a:solidFill>val="007A55"/&gt;</a:solidFill>
           <a:ln>
             <a:noFill/>
           </a:ln>
@@ -3806,10 +3813,8 @@
             <a:pPr algn="l"/>
             <a:r>
               <a:rPr sz="2400" b="1" i="0">
-                <a:solidFill>
-                  <a:srgbClr val="FFD700"/>
-                </a:solidFill>
-                <a:latin typeface="Calibri"/>
+                <a:solidFill>val="F0B429"/&gt;</a:solidFill>
+                <a:latin typeface="Poppins"/>
               </a:rPr>
               <a:t>4 - Mise en forme et tableaux</a:t>
             </a:r>
@@ -3830,9 +3835,7 @@
           <a:prstGeom prst="rect">
             <a:avLst/>
           </a:prstGeom>
-          <a:solidFill>
-            <a:srgbClr val="146B4A"/>
-          </a:solidFill>
+          <a:solidFill>val="007A55"/&gt;</a:solidFill>
           <a:ln>
             <a:noFill/>
           </a:ln>
@@ -3889,10 +3892,8 @@
             </a:pPr>
             <a:r>
               <a:rPr sz="1800">
-                <a:solidFill>
-                  <a:srgbClr val="FFFFFF"/>
-                </a:solidFill>
-                <a:latin typeface="Calibri"/>
+                <a:solidFill>val="FFFFFF"/&gt;</a:solidFill>
+                <a:latin typeface="Poppins"/>
               </a:rPr>
               <a:t>▪  Formats de nombres : monétaire, pourcentage, décimales.</a:t>
             </a:r>
@@ -3905,10 +3906,8 @@
             </a:pPr>
             <a:r>
               <a:rPr sz="1800">
-                <a:solidFill>
-                  <a:srgbClr val="FFFFFF"/>
-                </a:solidFill>
-                <a:latin typeface="Calibri"/>
+                <a:solidFill>val="FFFFFF"/&gt;</a:solidFill>
+                <a:latin typeface="Poppins"/>
               </a:rPr>
               <a:t>▪  Couleurs, bordures, fusion de cellules.</a:t>
             </a:r>
@@ -3921,10 +3920,8 @@
             </a:pPr>
             <a:r>
               <a:rPr sz="1800">
-                <a:solidFill>
-                  <a:srgbClr val="FFFFFF"/>
-                </a:solidFill>
-                <a:latin typeface="Calibri"/>
+                <a:solidFill>val="FFFFFF"/&gt;</a:solidFill>
+                <a:latin typeface="Poppins"/>
               </a:rPr>
               <a:t>▪  Mise en forme conditionnelle : seuils colorés.</a:t>
             </a:r>
@@ -3937,10 +3934,8 @@
             </a:pPr>
             <a:r>
               <a:rPr sz="1800">
-                <a:solidFill>
-                  <a:srgbClr val="FFFFFF"/>
-                </a:solidFill>
-                <a:latin typeface="Calibri"/>
+                <a:solidFill>val="FFFFFF"/&gt;</a:solidFill>
+                <a:latin typeface="Poppins"/>
               </a:rPr>
               <a:t>▪  Tableaux structurés et tri/filtre des données.</a:t>
             </a:r>
@@ -3971,6 +3966,47 @@
           </a:prstGeom>
         </p:spPr>
       </p:pic>
+      <p:sp>
+        <p:nvSpPr>
+          <p:cNvPr id="990001" name="Pied de page FLE"/>
+          <p:cNvSpPr>
+            <a:spLocks noGrp="1"/>
+          </p:cNvSpPr>
+          <p:nvPr/>
+        </p:nvSpPr>
+        <p:spPr>
+          <a:xfrm>
+            <a:off x="4343400" y="-329184"/>
+            <a:ext cx="4572000" cy="274320"/>
+          </a:xfrm>
+          <a:prstGeom prst="rect">
+            <a:avLst/>
+          </a:prstGeom>
+        </p:spPr>
+        <p:txBody>
+          <a:bodyPr anchor="b"/>
+          <a:lstStyle/>
+          <a:p>
+            <a:pPr algn="r">
+              <a:defRPr sz="900">
+                <a:solidFill>
+                  <a:srgbClr val="9AA7B6"/>
+                </a:solidFill>
+                <a:latin typeface="Poppins"/>
+              </a:defRPr>
+            </a:pPr>
+            <a:r>
+              <a:rPr lang="fr-FR" sz="900">
+                <a:solidFill>
+                  <a:srgbClr val="9AA7B6"/>
+                </a:solidFill>
+                <a:latin typeface="Poppins"/>
+              </a:rPr>
+              <a:t>Université de Mostaganem — Dr. Madani BELACEL</a:t>
+            </a:r>
+          </a:p>
+        </p:txBody>
+      </p:sp>
     </p:spTree>
   </p:cSld>
   <p:clrMapOvr>
@@ -3984,9 +4020,7 @@
   <p:cSld>
     <p:bg>
       <p:bgPr>
-        <a:solidFill>
-          <a:srgbClr val="0B3D2E"/>
-        </a:solidFill>
+        <a:solidFill>val="004A38"/&gt;</a:solidFill>
         <a:effectLst/>
       </p:bgPr>
     </p:bg>
@@ -4011,9 +4045,7 @@
           <a:prstGeom prst="rect">
             <a:avLst/>
           </a:prstGeom>
-          <a:solidFill>
-            <a:srgbClr val="146B4A"/>
-          </a:solidFill>
+          <a:solidFill>val="007A55"/&gt;</a:solidFill>
           <a:ln>
             <a:noFill/>
           </a:ln>
@@ -4055,9 +4087,7 @@
           <a:prstGeom prst="rect">
             <a:avLst/>
           </a:prstGeom>
-          <a:solidFill>
-            <a:srgbClr val="FFD700"/>
-          </a:solidFill>
+          <a:solidFill>val="F0B429"/&gt;</a:solidFill>
           <a:ln>
             <a:noFill/>
           </a:ln>
@@ -4099,9 +4129,7 @@
           <a:prstGeom prst="rect">
             <a:avLst/>
           </a:prstGeom>
-          <a:solidFill>
-            <a:srgbClr val="FFD700"/>
-          </a:solidFill>
+          <a:solidFill>val="F0B429"/&gt;</a:solidFill>
           <a:ln>
             <a:noFill/>
           </a:ln>
@@ -4143,9 +4171,7 @@
           <a:prstGeom prst="rect">
             <a:avLst/>
           </a:prstGeom>
-          <a:solidFill>
-            <a:srgbClr val="146B4A"/>
-          </a:solidFill>
+          <a:solidFill>val="007A55"/&gt;</a:solidFill>
           <a:ln>
             <a:noFill/>
           </a:ln>
@@ -4187,9 +4213,7 @@
           <a:prstGeom prst="rect">
             <a:avLst/>
           </a:prstGeom>
-          <a:solidFill>
-            <a:srgbClr val="146B4A"/>
-          </a:solidFill>
+          <a:solidFill>val="007A55"/&gt;</a:solidFill>
           <a:ln>
             <a:noFill/>
           </a:ln>
@@ -4242,10 +4266,8 @@
             <a:pPr algn="ctr"/>
             <a:r>
               <a:rPr sz="2200" b="1" i="0">
-                <a:solidFill>
-                  <a:srgbClr val="BBBBBB"/>
-                </a:solidFill>
-                <a:latin typeface="Calibri"/>
+                <a:solidFill>val="9AA7B6"/&gt;</a:solidFill>
+                <a:latin typeface="Poppins"/>
               </a:rPr>
               <a:t>Section 5</a:t>
             </a:r>
@@ -4277,10 +4299,8 @@
             <a:pPr algn="ctr"/>
             <a:r>
               <a:rPr sz="2800" b="1" i="0">
-                <a:solidFill>
-                  <a:srgbClr val="FFD700"/>
-                </a:solidFill>
-                <a:latin typeface="Calibri"/>
+                <a:solidFill>val="F0B429"/&gt;</a:solidFill>
+                <a:latin typeface="Poppins"/>
               </a:rPr>
               <a:t>Graphiques</a:t>
             </a:r>
@@ -4311,6 +4331,47 @@
           </a:prstGeom>
         </p:spPr>
       </p:pic>
+      <p:sp>
+        <p:nvSpPr>
+          <p:cNvPr id="990001" name="Pied de page FLE"/>
+          <p:cNvSpPr>
+            <a:spLocks noGrp="1"/>
+          </p:cNvSpPr>
+          <p:nvPr/>
+        </p:nvSpPr>
+        <p:spPr>
+          <a:xfrm>
+            <a:off x="4343400" y="-329184"/>
+            <a:ext cx="4572000" cy="274320"/>
+          </a:xfrm>
+          <a:prstGeom prst="rect">
+            <a:avLst/>
+          </a:prstGeom>
+        </p:spPr>
+        <p:txBody>
+          <a:bodyPr anchor="b"/>
+          <a:lstStyle/>
+          <a:p>
+            <a:pPr algn="r">
+              <a:defRPr sz="900">
+                <a:solidFill>
+                  <a:srgbClr val="9AA7B6"/>
+                </a:solidFill>
+                <a:latin typeface="Poppins"/>
+              </a:defRPr>
+            </a:pPr>
+            <a:r>
+              <a:rPr lang="fr-FR" sz="900">
+                <a:solidFill>
+                  <a:srgbClr val="9AA7B6"/>
+                </a:solidFill>
+                <a:latin typeface="Poppins"/>
+              </a:rPr>
+              <a:t>Université de Mostaganem — Dr. Madani BELACEL</a:t>
+            </a:r>
+          </a:p>
+        </p:txBody>
+      </p:sp>
     </p:spTree>
   </p:cSld>
   <p:clrMapOvr>
@@ -4324,9 +4385,7 @@
   <p:cSld>
     <p:bg>
       <p:bgPr>
-        <a:solidFill>
-          <a:srgbClr val="0B3D2E"/>
-        </a:solidFill>
+        <a:solidFill>val="004A38"/&gt;</a:solidFill>
         <a:effectLst/>
       </p:bgPr>
     </p:bg>
@@ -4351,9 +4410,7 @@
           <a:prstGeom prst="rect">
             <a:avLst/>
           </a:prstGeom>
-          <a:solidFill>
-            <a:srgbClr val="146B4A"/>
-          </a:solidFill>
+          <a:solidFill>val="007A55"/&gt;</a:solidFill>
           <a:ln>
             <a:noFill/>
           </a:ln>
@@ -4395,9 +4452,7 @@
           <a:prstGeom prst="rect">
             <a:avLst/>
           </a:prstGeom>
-          <a:solidFill>
-            <a:srgbClr val="FFD700"/>
-          </a:solidFill>
+          <a:solidFill>val="F0B429"/&gt;</a:solidFill>
           <a:ln>
             <a:noFill/>
           </a:ln>
@@ -4439,9 +4494,7 @@
           <a:prstGeom prst="rect">
             <a:avLst/>
           </a:prstGeom>
-          <a:solidFill>
-            <a:srgbClr val="FFD700"/>
-          </a:solidFill>
+          <a:solidFill>val="F0B429"/&gt;</a:solidFill>
           <a:ln>
             <a:noFill/>
           </a:ln>
@@ -4483,9 +4536,7 @@
           <a:prstGeom prst="rect">
             <a:avLst/>
           </a:prstGeom>
-          <a:solidFill>
-            <a:srgbClr val="146B4A"/>
-          </a:solidFill>
+          <a:solidFill>val="007A55"/&gt;</a:solidFill>
           <a:ln>
             <a:noFill/>
           </a:ln>
@@ -4538,10 +4589,8 @@
             <a:pPr algn="l"/>
             <a:r>
               <a:rPr sz="2400" b="1" i="0">
-                <a:solidFill>
-                  <a:srgbClr val="FFD700"/>
-                </a:solidFill>
-                <a:latin typeface="Calibri"/>
+                <a:solidFill>val="F0B429"/&gt;</a:solidFill>
+                <a:latin typeface="Poppins"/>
               </a:rPr>
               <a:t>5 - Graphiques</a:t>
             </a:r>
@@ -4562,9 +4611,7 @@
           <a:prstGeom prst="rect">
             <a:avLst/>
           </a:prstGeom>
-          <a:solidFill>
-            <a:srgbClr val="146B4A"/>
-          </a:solidFill>
+          <a:solidFill>val="007A55"/&gt;</a:solidFill>
           <a:ln>
             <a:noFill/>
           </a:ln>
@@ -4621,10 +4668,8 @@
             </a:pPr>
             <a:r>
               <a:rPr sz="1800">
-                <a:solidFill>
-                  <a:srgbClr val="FFFFFF"/>
-                </a:solidFill>
-                <a:latin typeface="Calibri"/>
+                <a:solidFill>val="FFFFFF"/&gt;</a:solidFill>
+                <a:latin typeface="Poppins"/>
               </a:rPr>
               <a:t>▪  Visualiser les données : histogrammes, courbes, secteurs.</a:t>
             </a:r>
@@ -4637,10 +4682,8 @@
             </a:pPr>
             <a:r>
               <a:rPr sz="1800">
-                <a:solidFill>
-                  <a:srgbClr val="FFFFFF"/>
-                </a:solidFill>
-                <a:latin typeface="Calibri"/>
+                <a:solidFill>val="FFFFFF"/&gt;</a:solidFill>
+                <a:latin typeface="Poppins"/>
               </a:rPr>
               <a:t>▪  Création : sélectionner les données &gt; Insertion &gt; Graphique.</a:t>
             </a:r>
@@ -4653,10 +4696,8 @@
             </a:pPr>
             <a:r>
               <a:rPr sz="1800">
-                <a:solidFill>
-                  <a:srgbClr val="FFFFFF"/>
-                </a:solidFill>
-                <a:latin typeface="Calibri"/>
+                <a:solidFill>val="FFFFFF"/&gt;</a:solidFill>
+                <a:latin typeface="Poppins"/>
               </a:rPr>
               <a:t>▪  Éléments : titre, axes, légende, étiquettes.</a:t>
             </a:r>
@@ -4669,10 +4710,8 @@
             </a:pPr>
             <a:r>
               <a:rPr sz="1800">
-                <a:solidFill>
-                  <a:srgbClr val="FFFFFF"/>
-                </a:solidFill>
-                <a:latin typeface="Calibri"/>
+                <a:solidFill>val="FFFFFF"/&gt;</a:solidFill>
+                <a:latin typeface="Poppins"/>
               </a:rPr>
               <a:t>▪  Modifier type, couleurs et source de données.</a:t>
             </a:r>
@@ -4703,6 +4742,47 @@
           </a:prstGeom>
         </p:spPr>
       </p:pic>
+      <p:sp>
+        <p:nvSpPr>
+          <p:cNvPr id="990001" name="Pied de page FLE"/>
+          <p:cNvSpPr>
+            <a:spLocks noGrp="1"/>
+          </p:cNvSpPr>
+          <p:nvPr/>
+        </p:nvSpPr>
+        <p:spPr>
+          <a:xfrm>
+            <a:off x="4343400" y="-329184"/>
+            <a:ext cx="4572000" cy="274320"/>
+          </a:xfrm>
+          <a:prstGeom prst="rect">
+            <a:avLst/>
+          </a:prstGeom>
+        </p:spPr>
+        <p:txBody>
+          <a:bodyPr anchor="b"/>
+          <a:lstStyle/>
+          <a:p>
+            <a:pPr algn="r">
+              <a:defRPr sz="900">
+                <a:solidFill>
+                  <a:srgbClr val="9AA7B6"/>
+                </a:solidFill>
+                <a:latin typeface="Poppins"/>
+              </a:defRPr>
+            </a:pPr>
+            <a:r>
+              <a:rPr lang="fr-FR" sz="900">
+                <a:solidFill>
+                  <a:srgbClr val="9AA7B6"/>
+                </a:solidFill>
+                <a:latin typeface="Poppins"/>
+              </a:rPr>
+              <a:t>Université de Mostaganem — Dr. Madani BELACEL</a:t>
+            </a:r>
+          </a:p>
+        </p:txBody>
+      </p:sp>
     </p:spTree>
   </p:cSld>
   <p:clrMapOvr>
@@ -4716,9 +4796,7 @@
   <p:cSld>
     <p:bg>
       <p:bgPr>
-        <a:solidFill>
-          <a:srgbClr val="0B3D2E"/>
-        </a:solidFill>
+        <a:solidFill>val="004A38"/&gt;</a:solidFill>
         <a:effectLst/>
       </p:bgPr>
     </p:bg>
@@ -4743,9 +4821,7 @@
           <a:prstGeom prst="rect">
             <a:avLst/>
           </a:prstGeom>
-          <a:solidFill>
-            <a:srgbClr val="146B4A"/>
-          </a:solidFill>
+          <a:solidFill>val="007A55"/&gt;</a:solidFill>
           <a:ln>
             <a:noFill/>
           </a:ln>
@@ -4787,9 +4863,7 @@
           <a:prstGeom prst="rect">
             <a:avLst/>
           </a:prstGeom>
-          <a:solidFill>
-            <a:srgbClr val="FFD700"/>
-          </a:solidFill>
+          <a:solidFill>val="F0B429"/&gt;</a:solidFill>
           <a:ln>
             <a:noFill/>
           </a:ln>
@@ -4831,9 +4905,7 @@
           <a:prstGeom prst="rect">
             <a:avLst/>
           </a:prstGeom>
-          <a:solidFill>
-            <a:srgbClr val="FFD700"/>
-          </a:solidFill>
+          <a:solidFill>val="F0B429"/&gt;</a:solidFill>
           <a:ln>
             <a:noFill/>
           </a:ln>
@@ -4875,9 +4947,7 @@
           <a:prstGeom prst="rect">
             <a:avLst/>
           </a:prstGeom>
-          <a:solidFill>
-            <a:srgbClr val="146B4A"/>
-          </a:solidFill>
+          <a:solidFill>val="007A55"/&gt;</a:solidFill>
           <a:ln>
             <a:noFill/>
           </a:ln>
@@ -4919,9 +4989,7 @@
           <a:prstGeom prst="rect">
             <a:avLst/>
           </a:prstGeom>
-          <a:solidFill>
-            <a:srgbClr val="146B4A"/>
-          </a:solidFill>
+          <a:solidFill>val="007A55"/&gt;</a:solidFill>
           <a:ln>
             <a:noFill/>
           </a:ln>
@@ -4974,10 +5042,8 @@
             <a:pPr algn="ctr"/>
             <a:r>
               <a:rPr sz="2200" b="1" i="0">
-                <a:solidFill>
-                  <a:srgbClr val="BBBBBB"/>
-                </a:solidFill>
-                <a:latin typeface="Calibri"/>
+                <a:solidFill>val="9AA7B6"/&gt;</a:solidFill>
+                <a:latin typeface="Poppins"/>
               </a:rPr>
               <a:t>Section 6</a:t>
             </a:r>
@@ -5009,10 +5075,8 @@
             <a:pPr algn="ctr"/>
             <a:r>
               <a:rPr sz="2800" b="1" i="0">
-                <a:solidFill>
-                  <a:srgbClr val="FFD700"/>
-                </a:solidFill>
-                <a:latin typeface="Calibri"/>
+                <a:solidFill>val="F0B429"/&gt;</a:solidFill>
+                <a:latin typeface="Poppins"/>
               </a:rPr>
               <a:t>Analyse des données</a:t>
             </a:r>
@@ -5043,6 +5107,47 @@
           </a:prstGeom>
         </p:spPr>
       </p:pic>
+      <p:sp>
+        <p:nvSpPr>
+          <p:cNvPr id="990001" name="Pied de page FLE"/>
+          <p:cNvSpPr>
+            <a:spLocks noGrp="1"/>
+          </p:cNvSpPr>
+          <p:nvPr/>
+        </p:nvSpPr>
+        <p:spPr>
+          <a:xfrm>
+            <a:off x="4343400" y="-329184"/>
+            <a:ext cx="4572000" cy="274320"/>
+          </a:xfrm>
+          <a:prstGeom prst="rect">
+            <a:avLst/>
+          </a:prstGeom>
+        </p:spPr>
+        <p:txBody>
+          <a:bodyPr anchor="b"/>
+          <a:lstStyle/>
+          <a:p>
+            <a:pPr algn="r">
+              <a:defRPr sz="900">
+                <a:solidFill>
+                  <a:srgbClr val="9AA7B6"/>
+                </a:solidFill>
+                <a:latin typeface="Poppins"/>
+              </a:defRPr>
+            </a:pPr>
+            <a:r>
+              <a:rPr lang="fr-FR" sz="900">
+                <a:solidFill>
+                  <a:srgbClr val="9AA7B6"/>
+                </a:solidFill>
+                <a:latin typeface="Poppins"/>
+              </a:rPr>
+              <a:t>Université de Mostaganem — Dr. Madani BELACEL</a:t>
+            </a:r>
+          </a:p>
+        </p:txBody>
+      </p:sp>
     </p:spTree>
   </p:cSld>
   <p:clrMapOvr>
@@ -5056,9 +5161,7 @@
   <p:cSld>
     <p:bg>
       <p:bgPr>
-        <a:solidFill>
-          <a:srgbClr val="0B3D2E"/>
-        </a:solidFill>
+        <a:solidFill>val="004A38"/&gt;</a:solidFill>
         <a:effectLst/>
       </p:bgPr>
     </p:bg>
@@ -5083,9 +5186,7 @@
           <a:prstGeom prst="rect">
             <a:avLst/>
           </a:prstGeom>
-          <a:solidFill>
-            <a:srgbClr val="146B4A"/>
-          </a:solidFill>
+          <a:solidFill>val="007A55"/&gt;</a:solidFill>
           <a:ln>
             <a:noFill/>
           </a:ln>
@@ -5127,9 +5228,7 @@
           <a:prstGeom prst="rect">
             <a:avLst/>
           </a:prstGeom>
-          <a:solidFill>
-            <a:srgbClr val="FFD700"/>
-          </a:solidFill>
+          <a:solidFill>val="F0B429"/&gt;</a:solidFill>
           <a:ln>
             <a:noFill/>
           </a:ln>
@@ -5171,9 +5270,7 @@
           <a:prstGeom prst="rect">
             <a:avLst/>
           </a:prstGeom>
-          <a:solidFill>
-            <a:srgbClr val="FFD700"/>
-          </a:solidFill>
+          <a:solidFill>val="F0B429"/&gt;</a:solidFill>
           <a:ln>
             <a:noFill/>
           </a:ln>
@@ -5215,9 +5312,7 @@
           <a:prstGeom prst="rect">
             <a:avLst/>
           </a:prstGeom>
-          <a:solidFill>
-            <a:srgbClr val="146B4A"/>
-          </a:solidFill>
+          <a:solidFill>val="007A55"/&gt;</a:solidFill>
           <a:ln>
             <a:noFill/>
           </a:ln>
@@ -5270,10 +5365,8 @@
             <a:pPr algn="l"/>
             <a:r>
               <a:rPr sz="2400" b="1" i="0">
-                <a:solidFill>
-                  <a:srgbClr val="FFD700"/>
-                </a:solidFill>
-                <a:latin typeface="Calibri"/>
+                <a:solidFill>val="F0B429"/&gt;</a:solidFill>
+                <a:latin typeface="Poppins"/>
               </a:rPr>
               <a:t>6 - Analyse des données</a:t>
             </a:r>
@@ -5294,9 +5387,7 @@
           <a:prstGeom prst="rect">
             <a:avLst/>
           </a:prstGeom>
-          <a:solidFill>
-            <a:srgbClr val="146B4A"/>
-          </a:solidFill>
+          <a:solidFill>val="007A55"/&gt;</a:solidFill>
           <a:ln>
             <a:noFill/>
           </a:ln>
@@ -5353,10 +5444,8 @@
             </a:pPr>
             <a:r>
               <a:rPr sz="1800">
-                <a:solidFill>
-                  <a:srgbClr val="FFFFFF"/>
-                </a:solidFill>
-                <a:latin typeface="Calibri"/>
+                <a:solidFill>val="FFFFFF"/&gt;</a:solidFill>
+                <a:latin typeface="Poppins"/>
               </a:rPr>
               <a:t>▪  Tri croissant/décroissant selon une ou plusieurs colonnes.</a:t>
             </a:r>
@@ -5369,10 +5458,8 @@
             </a:pPr>
             <a:r>
               <a:rPr sz="1800">
-                <a:solidFill>
-                  <a:srgbClr val="FFFFFF"/>
-                </a:solidFill>
-                <a:latin typeface="Calibri"/>
+                <a:solidFill>val="FFFFFF"/&gt;</a:solidFill>
+                <a:latin typeface="Poppins"/>
               </a:rPr>
               <a:t>▪  Filtres automatiques pour extraire des sous-ensembles.</a:t>
             </a:r>
@@ -5385,10 +5472,8 @@
             </a:pPr>
             <a:r>
               <a:rPr sz="1800">
-                <a:solidFill>
-                  <a:srgbClr val="FFFFFF"/>
-                </a:solidFill>
-                <a:latin typeface="Calibri"/>
+                <a:solidFill>val="FFFFFF"/&gt;</a:solidFill>
+                <a:latin typeface="Poppins"/>
               </a:rPr>
               <a:t>▪  Tableaux croisés dynamiques : synthèses rapides.</a:t>
             </a:r>
@@ -5401,10 +5486,8 @@
             </a:pPr>
             <a:r>
               <a:rPr sz="1800">
-                <a:solidFill>
-                  <a:srgbClr val="FFFFFF"/>
-                </a:solidFill>
-                <a:latin typeface="Calibri"/>
+                <a:solidFill>val="FFFFFF"/&gt;</a:solidFill>
+                <a:latin typeface="Poppins"/>
               </a:rPr>
               <a:t>▪  Valeur cible et tables d'hypothèses.</a:t>
             </a:r>
@@ -5417,10 +5500,8 @@
             </a:pPr>
             <a:r>
               <a:rPr sz="1800">
-                <a:solidFill>
-                  <a:srgbClr val="FFFFFF"/>
-                </a:solidFill>
-                <a:latin typeface="Calibri"/>
+                <a:solidFill>val="FFFFFF"/&gt;</a:solidFill>
+                <a:latin typeface="Poppins"/>
               </a:rPr>
               <a:t>▪  Validation des données : listes déroulantes, contraintes.</a:t>
             </a:r>
@@ -5451,6 +5532,47 @@
           </a:prstGeom>
         </p:spPr>
       </p:pic>
+      <p:sp>
+        <p:nvSpPr>
+          <p:cNvPr id="990001" name="Pied de page FLE"/>
+          <p:cNvSpPr>
+            <a:spLocks noGrp="1"/>
+          </p:cNvSpPr>
+          <p:nvPr/>
+        </p:nvSpPr>
+        <p:spPr>
+          <a:xfrm>
+            <a:off x="4343400" y="-329184"/>
+            <a:ext cx="4572000" cy="274320"/>
+          </a:xfrm>
+          <a:prstGeom prst="rect">
+            <a:avLst/>
+          </a:prstGeom>
+        </p:spPr>
+        <p:txBody>
+          <a:bodyPr anchor="b"/>
+          <a:lstStyle/>
+          <a:p>
+            <a:pPr algn="r">
+              <a:defRPr sz="900">
+                <a:solidFill>
+                  <a:srgbClr val="9AA7B6"/>
+                </a:solidFill>
+                <a:latin typeface="Poppins"/>
+              </a:defRPr>
+            </a:pPr>
+            <a:r>
+              <a:rPr lang="fr-FR" sz="900">
+                <a:solidFill>
+                  <a:srgbClr val="9AA7B6"/>
+                </a:solidFill>
+                <a:latin typeface="Poppins"/>
+              </a:rPr>
+              <a:t>Université de Mostaganem — Dr. Madani BELACEL</a:t>
+            </a:r>
+          </a:p>
+        </p:txBody>
+      </p:sp>
     </p:spTree>
   </p:cSld>
   <p:clrMapOvr>
@@ -5464,9 +5586,7 @@
   <p:cSld>
     <p:bg>
       <p:bgPr>
-        <a:solidFill>
-          <a:srgbClr val="0B3D2E"/>
-        </a:solidFill>
+        <a:solidFill>val="004A38"/&gt;</a:solidFill>
         <a:effectLst/>
       </p:bgPr>
     </p:bg>
@@ -5491,9 +5611,7 @@
           <a:prstGeom prst="rect">
             <a:avLst/>
           </a:prstGeom>
-          <a:solidFill>
-            <a:srgbClr val="146B4A"/>
-          </a:solidFill>
+          <a:solidFill>val="007A55"/&gt;</a:solidFill>
           <a:ln>
             <a:noFill/>
           </a:ln>
@@ -5535,9 +5653,7 @@
           <a:prstGeom prst="rect">
             <a:avLst/>
           </a:prstGeom>
-          <a:solidFill>
-            <a:srgbClr val="FFD700"/>
-          </a:solidFill>
+          <a:solidFill>val="F0B429"/&gt;</a:solidFill>
           <a:ln>
             <a:noFill/>
           </a:ln>
@@ -5579,9 +5695,7 @@
           <a:prstGeom prst="rect">
             <a:avLst/>
           </a:prstGeom>
-          <a:solidFill>
-            <a:srgbClr val="FFD700"/>
-          </a:solidFill>
+          <a:solidFill>val="F0B429"/&gt;</a:solidFill>
           <a:ln>
             <a:noFill/>
           </a:ln>
@@ -5623,9 +5737,7 @@
           <a:prstGeom prst="rect">
             <a:avLst/>
           </a:prstGeom>
-          <a:solidFill>
-            <a:srgbClr val="146B4A"/>
-          </a:solidFill>
+          <a:solidFill>val="007A55"/&gt;</a:solidFill>
           <a:ln>
             <a:noFill/>
           </a:ln>
@@ -5667,9 +5779,7 @@
           <a:prstGeom prst="rect">
             <a:avLst/>
           </a:prstGeom>
-          <a:solidFill>
-            <a:srgbClr val="146B4A"/>
-          </a:solidFill>
+          <a:solidFill>val="007A55"/&gt;</a:solidFill>
           <a:ln>
             <a:noFill/>
           </a:ln>
@@ -5722,10 +5832,8 @@
             <a:pPr algn="ctr"/>
             <a:r>
               <a:rPr sz="2200" b="1" i="0">
-                <a:solidFill>
-                  <a:srgbClr val="BBBBBB"/>
-                </a:solidFill>
-                <a:latin typeface="Calibri"/>
+                <a:solidFill>val="9AA7B6"/&gt;</a:solidFill>
+                <a:latin typeface="Poppins"/>
               </a:rPr>
               <a:t>Section 7</a:t>
             </a:r>
@@ -5757,10 +5865,8 @@
             <a:pPr algn="ctr"/>
             <a:r>
               <a:rPr sz="2800" b="1" i="0">
-                <a:solidFill>
-                  <a:srgbClr val="FFD700"/>
-                </a:solidFill>
-                <a:latin typeface="Calibri"/>
+                <a:solidFill>val="F0B429"/&gt;</a:solidFill>
+                <a:latin typeface="Poppins"/>
               </a:rPr>
               <a:t>Impression et bonnes pratiques</a:t>
             </a:r>
@@ -5791,6 +5897,47 @@
           </a:prstGeom>
         </p:spPr>
       </p:pic>
+      <p:sp>
+        <p:nvSpPr>
+          <p:cNvPr id="990001" name="Pied de page FLE"/>
+          <p:cNvSpPr>
+            <a:spLocks noGrp="1"/>
+          </p:cNvSpPr>
+          <p:nvPr/>
+        </p:nvSpPr>
+        <p:spPr>
+          <a:xfrm>
+            <a:off x="4343400" y="-329184"/>
+            <a:ext cx="4572000" cy="274320"/>
+          </a:xfrm>
+          <a:prstGeom prst="rect">
+            <a:avLst/>
+          </a:prstGeom>
+        </p:spPr>
+        <p:txBody>
+          <a:bodyPr anchor="b"/>
+          <a:lstStyle/>
+          <a:p>
+            <a:pPr algn="r">
+              <a:defRPr sz="900">
+                <a:solidFill>
+                  <a:srgbClr val="9AA7B6"/>
+                </a:solidFill>
+                <a:latin typeface="Poppins"/>
+              </a:defRPr>
+            </a:pPr>
+            <a:r>
+              <a:rPr lang="fr-FR" sz="900">
+                <a:solidFill>
+                  <a:srgbClr val="9AA7B6"/>
+                </a:solidFill>
+                <a:latin typeface="Poppins"/>
+              </a:rPr>
+              <a:t>Université de Mostaganem — Dr. Madani BELACEL</a:t>
+            </a:r>
+          </a:p>
+        </p:txBody>
+      </p:sp>
     </p:spTree>
   </p:cSld>
   <p:clrMapOvr>
@@ -5804,9 +5951,7 @@
   <p:cSld>
     <p:bg>
       <p:bgPr>
-        <a:solidFill>
-          <a:srgbClr val="0B3D2E"/>
-        </a:solidFill>
+        <a:solidFill>val="004A38"/&gt;</a:solidFill>
         <a:effectLst/>
       </p:bgPr>
     </p:bg>
@@ -5831,9 +5976,7 @@
           <a:prstGeom prst="rect">
             <a:avLst/>
           </a:prstGeom>
-          <a:solidFill>
-            <a:srgbClr val="146B4A"/>
-          </a:solidFill>
+          <a:solidFill>val="007A55"/&gt;</a:solidFill>
           <a:ln>
             <a:noFill/>
           </a:ln>
@@ -5875,9 +6018,7 @@
           <a:prstGeom prst="rect">
             <a:avLst/>
           </a:prstGeom>
-          <a:solidFill>
-            <a:srgbClr val="FFD700"/>
-          </a:solidFill>
+          <a:solidFill>val="F0B429"/&gt;</a:solidFill>
           <a:ln>
             <a:noFill/>
           </a:ln>
@@ -5919,9 +6060,7 @@
           <a:prstGeom prst="rect">
             <a:avLst/>
           </a:prstGeom>
-          <a:solidFill>
-            <a:srgbClr val="FFD700"/>
-          </a:solidFill>
+          <a:solidFill>val="F0B429"/&gt;</a:solidFill>
           <a:ln>
             <a:noFill/>
           </a:ln>
@@ -5963,9 +6102,7 @@
           <a:prstGeom prst="rect">
             <a:avLst/>
           </a:prstGeom>
-          <a:solidFill>
-            <a:srgbClr val="146B4A"/>
-          </a:solidFill>
+          <a:solidFill>val="007A55"/&gt;</a:solidFill>
           <a:ln>
             <a:noFill/>
           </a:ln>
@@ -6018,10 +6155,8 @@
             <a:pPr algn="l"/>
             <a:r>
               <a:rPr sz="2400" b="1" i="0">
-                <a:solidFill>
-                  <a:srgbClr val="FFD700"/>
-                </a:solidFill>
-                <a:latin typeface="Calibri"/>
+                <a:solidFill>val="F0B429"/&gt;</a:solidFill>
+                <a:latin typeface="Poppins"/>
               </a:rPr>
               <a:t>7 - Impression et bonnes pratiques</a:t>
             </a:r>
@@ -6042,9 +6177,7 @@
           <a:prstGeom prst="rect">
             <a:avLst/>
           </a:prstGeom>
-          <a:solidFill>
-            <a:srgbClr val="146B4A"/>
-          </a:solidFill>
+          <a:solidFill>val="007A55"/&gt;</a:solidFill>
           <a:ln>
             <a:noFill/>
           </a:ln>
@@ -6101,10 +6234,8 @@
             </a:pPr>
             <a:r>
               <a:rPr sz="1800">
-                <a:solidFill>
-                  <a:srgbClr val="FFFFFF"/>
-                </a:solidFill>
-                <a:latin typeface="Calibri"/>
+                <a:solidFill>val="FFFFFF"/&gt;</a:solidFill>
+                <a:latin typeface="Poppins"/>
               </a:rPr>
               <a:t>▪  Zone d'impression, mise en page, ajuster à une page.</a:t>
             </a:r>
@@ -6117,10 +6248,8 @@
             </a:pPr>
             <a:r>
               <a:rPr sz="1800">
-                <a:solidFill>
-                  <a:srgbClr val="FFFFFF"/>
-                </a:solidFill>
-                <a:latin typeface="Calibri"/>
+                <a:solidFill>val="FFFFFF"/&gt;</a:solidFill>
+                <a:latin typeface="Poppins"/>
               </a:rPr>
               <a:t>▪  Figer les volets et masquer lignes/colonnes inutiles.</a:t>
             </a:r>
@@ -6133,10 +6262,8 @@
             </a:pPr>
             <a:r>
               <a:rPr sz="1800">
-                <a:solidFill>
-                  <a:srgbClr val="FFFFFF"/>
-                </a:solidFill>
-                <a:latin typeface="Calibri"/>
+                <a:solidFill>val="FFFFFF"/&gt;</a:solidFill>
+                <a:latin typeface="Poppins"/>
               </a:rPr>
               <a:t>▪  Nommer les feuilles et utiliser des commentaires.</a:t>
             </a:r>
@@ -6149,10 +6276,8 @@
             </a:pPr>
             <a:r>
               <a:rPr sz="1800">
-                <a:solidFill>
-                  <a:srgbClr val="FFFFFF"/>
-                </a:solidFill>
-                <a:latin typeface="Calibri"/>
+                <a:solidFill>val="FFFFFF"/&gt;</a:solidFill>
+                <a:latin typeface="Poppins"/>
               </a:rPr>
               <a:t>▪  Protéger les cellules par mot de passe.</a:t>
             </a:r>
@@ -6183,6 +6308,47 @@
           </a:prstGeom>
         </p:spPr>
       </p:pic>
+      <p:sp>
+        <p:nvSpPr>
+          <p:cNvPr id="990001" name="Pied de page FLE"/>
+          <p:cNvSpPr>
+            <a:spLocks noGrp="1"/>
+          </p:cNvSpPr>
+          <p:nvPr/>
+        </p:nvSpPr>
+        <p:spPr>
+          <a:xfrm>
+            <a:off x="4343400" y="-329184"/>
+            <a:ext cx="4572000" cy="274320"/>
+          </a:xfrm>
+          <a:prstGeom prst="rect">
+            <a:avLst/>
+          </a:prstGeom>
+        </p:spPr>
+        <p:txBody>
+          <a:bodyPr anchor="b"/>
+          <a:lstStyle/>
+          <a:p>
+            <a:pPr algn="r">
+              <a:defRPr sz="900">
+                <a:solidFill>
+                  <a:srgbClr val="9AA7B6"/>
+                </a:solidFill>
+                <a:latin typeface="Poppins"/>
+              </a:defRPr>
+            </a:pPr>
+            <a:r>
+              <a:rPr lang="fr-FR" sz="900">
+                <a:solidFill>
+                  <a:srgbClr val="9AA7B6"/>
+                </a:solidFill>
+                <a:latin typeface="Poppins"/>
+              </a:rPr>
+              <a:t>Université de Mostaganem — Dr. Madani BELACEL</a:t>
+            </a:r>
+          </a:p>
+        </p:txBody>
+      </p:sp>
     </p:spTree>
   </p:cSld>
   <p:clrMapOvr>
@@ -6196,9 +6362,7 @@
   <p:cSld>
     <p:bg>
       <p:bgPr>
-        <a:solidFill>
-          <a:srgbClr val="FF8C00"/>
-        </a:solidFill>
+        <a:solidFill>val="F0B429"/&gt;</a:solidFill>
         <a:effectLst/>
       </p:bgPr>
     </p:bg>
@@ -6223,9 +6387,7 @@
           <a:prstGeom prst="rect">
             <a:avLst/>
           </a:prstGeom>
-          <a:solidFill>
-            <a:srgbClr val="146B4A"/>
-          </a:solidFill>
+          <a:solidFill>val="007A55"/&gt;</a:solidFill>
           <a:ln>
             <a:noFill/>
           </a:ln>
@@ -6267,9 +6429,7 @@
           <a:prstGeom prst="rect">
             <a:avLst/>
           </a:prstGeom>
-          <a:solidFill>
-            <a:srgbClr val="FFD700"/>
-          </a:solidFill>
+          <a:solidFill>val="F0B429"/&gt;</a:solidFill>
           <a:ln>
             <a:noFill/>
           </a:ln>
@@ -6311,9 +6471,7 @@
           <a:prstGeom prst="rect">
             <a:avLst/>
           </a:prstGeom>
-          <a:solidFill>
-            <a:srgbClr val="FFD700"/>
-          </a:solidFill>
+          <a:solidFill>val="F0B429"/&gt;</a:solidFill>
           <a:ln>
             <a:noFill/>
           </a:ln>
@@ -6355,9 +6513,7 @@
           <a:prstGeom prst="rect">
             <a:avLst/>
           </a:prstGeom>
-          <a:solidFill>
-            <a:srgbClr val="146B4A"/>
-          </a:solidFill>
+          <a:solidFill>val="007A55"/&gt;</a:solidFill>
           <a:ln>
             <a:noFill/>
           </a:ln>
@@ -6410,10 +6566,8 @@
             <a:pPr algn="ctr"/>
             <a:r>
               <a:rPr sz="3000" b="1" i="0">
-                <a:solidFill>
-                  <a:srgbClr val="0B3D2E"/>
-                </a:solidFill>
-                <a:latin typeface="Calibri"/>
+                <a:solidFill>val="004A38"/&gt;</a:solidFill>
+                <a:latin typeface="Poppins"/>
               </a:rPr>
               <a:t>Intérêt pratique</a:t>
             </a:r>
@@ -6449,10 +6603,8 @@
             </a:pPr>
             <a:r>
               <a:rPr sz="1700">
-                <a:solidFill>
-                  <a:srgbClr val="0B3D2E"/>
-                </a:solidFill>
-                <a:latin typeface="Calibri"/>
+                <a:solidFill>val="004A38"/&gt;</a:solidFill>
+                <a:latin typeface="Poppins"/>
               </a:rPr>
               <a:t>▪  Calculer automatiquement les moyennes et classements des étudiants.</a:t>
             </a:r>
@@ -6465,10 +6617,8 @@
             </a:pPr>
             <a:r>
               <a:rPr sz="1700">
-                <a:solidFill>
-                  <a:srgbClr val="0B3D2E"/>
-                </a:solidFill>
-                <a:latin typeface="Calibri"/>
+                <a:solidFill>val="004A38"/&gt;</a:solidFill>
+                <a:latin typeface="Poppins"/>
               </a:rPr>
               <a:t>▪  Gérer un budget ou un inventaire sans erreurs manuelles.</a:t>
             </a:r>
@@ -6481,10 +6631,8 @@
             </a:pPr>
             <a:r>
               <a:rPr sz="1700">
-                <a:solidFill>
-                  <a:srgbClr val="0B3D2E"/>
-                </a:solidFill>
-                <a:latin typeface="Calibri"/>
+                <a:solidFill>val="004A38"/&gt;</a:solidFill>
+                <a:latin typeface="Poppins"/>
               </a:rPr>
               <a:t>▪  Produire des graphiques pour présenter des résultats.</a:t>
             </a:r>
@@ -6497,10 +6645,8 @@
             </a:pPr>
             <a:r>
               <a:rPr sz="1700">
-                <a:solidFill>
-                  <a:srgbClr val="0B3D2E"/>
-                </a:solidFill>
-                <a:latin typeface="Calibri"/>
+                <a:solidFill>val="004A38"/&gt;</a:solidFill>
+                <a:latin typeface="Poppins"/>
               </a:rPr>
               <a:t>▪  Analyser de grands volumes de données avec TCD et filtres.</a:t>
             </a:r>
@@ -6531,6 +6677,47 @@
           </a:prstGeom>
         </p:spPr>
       </p:pic>
+      <p:sp>
+        <p:nvSpPr>
+          <p:cNvPr id="990001" name="Pied de page FLE"/>
+          <p:cNvSpPr>
+            <a:spLocks noGrp="1"/>
+          </p:cNvSpPr>
+          <p:nvPr/>
+        </p:nvSpPr>
+        <p:spPr>
+          <a:xfrm>
+            <a:off x="4343400" y="-329184"/>
+            <a:ext cx="4572000" cy="274320"/>
+          </a:xfrm>
+          <a:prstGeom prst="rect">
+            <a:avLst/>
+          </a:prstGeom>
+        </p:spPr>
+        <p:txBody>
+          <a:bodyPr anchor="b"/>
+          <a:lstStyle/>
+          <a:p>
+            <a:pPr algn="r">
+              <a:defRPr sz="900">
+                <a:solidFill>
+                  <a:srgbClr val="9AA7B6"/>
+                </a:solidFill>
+                <a:latin typeface="Poppins"/>
+              </a:defRPr>
+            </a:pPr>
+            <a:r>
+              <a:rPr lang="fr-FR" sz="900">
+                <a:solidFill>
+                  <a:srgbClr val="9AA7B6"/>
+                </a:solidFill>
+                <a:latin typeface="Poppins"/>
+              </a:rPr>
+              <a:t>Université de Mostaganem — Dr. Madani BELACEL</a:t>
+            </a:r>
+          </a:p>
+        </p:txBody>
+      </p:sp>
     </p:spTree>
   </p:cSld>
   <p:clrMapOvr>
@@ -6544,9 +6731,7 @@
   <p:cSld>
     <p:bg>
       <p:bgPr>
-        <a:solidFill>
-          <a:srgbClr val="0B3D2E"/>
-        </a:solidFill>
+        <a:solidFill>val="004A38"/&gt;</a:solidFill>
         <a:effectLst/>
       </p:bgPr>
     </p:bg>
@@ -6571,9 +6756,7 @@
           <a:prstGeom prst="rect">
             <a:avLst/>
           </a:prstGeom>
-          <a:solidFill>
-            <a:srgbClr val="146B4A"/>
-          </a:solidFill>
+          <a:solidFill>val="007A55"/&gt;</a:solidFill>
           <a:ln>
             <a:noFill/>
           </a:ln>
@@ -6615,9 +6798,7 @@
           <a:prstGeom prst="rect">
             <a:avLst/>
           </a:prstGeom>
-          <a:solidFill>
-            <a:srgbClr val="FFD700"/>
-          </a:solidFill>
+          <a:solidFill>val="F0B429"/&gt;</a:solidFill>
           <a:ln>
             <a:noFill/>
           </a:ln>
@@ -6659,9 +6840,7 @@
           <a:prstGeom prst="rect">
             <a:avLst/>
           </a:prstGeom>
-          <a:solidFill>
-            <a:srgbClr val="FFD700"/>
-          </a:solidFill>
+          <a:solidFill>val="F0B429"/&gt;</a:solidFill>
           <a:ln>
             <a:noFill/>
           </a:ln>
@@ -6703,9 +6882,7 @@
           <a:prstGeom prst="rect">
             <a:avLst/>
           </a:prstGeom>
-          <a:solidFill>
-            <a:srgbClr val="146B4A"/>
-          </a:solidFill>
+          <a:solidFill>val="007A55"/&gt;</a:solidFill>
           <a:ln>
             <a:noFill/>
           </a:ln>
@@ -6758,10 +6935,8 @@
             <a:pPr algn="l"/>
             <a:r>
               <a:rPr sz="2600" b="1" i="0">
-                <a:solidFill>
-                  <a:srgbClr val="FFD700"/>
-                </a:solidFill>
-                <a:latin typeface="Calibri"/>
+                <a:solidFill>val="F0B429"/&gt;</a:solidFill>
+                <a:latin typeface="Poppins"/>
               </a:rPr>
               <a:t>Auto-évaluation (QCM)</a:t>
             </a:r>
@@ -6782,9 +6957,7 @@
           <a:prstGeom prst="rect">
             <a:avLst/>
           </a:prstGeom>
-          <a:solidFill>
-            <a:srgbClr val="146B4A"/>
-          </a:solidFill>
+          <a:solidFill>val="007A55"/&gt;</a:solidFill>
           <a:ln>
             <a:noFill/>
           </a:ln>
@@ -6841,10 +7014,8 @@
             </a:pPr>
             <a:r>
               <a:rPr sz="1500" b="1">
-                <a:solidFill>
-                  <a:srgbClr val="FFFFFF"/>
-                </a:solidFill>
-                <a:latin typeface="Calibri"/>
+                <a:solidFill>val="FFFFFF"/&gt;</a:solidFill>
+                <a:latin typeface="Poppins"/>
               </a:rPr>
               <a:t>1. Une formule commence toujours par :</a:t>
             </a:r>
@@ -6857,10 +7028,8 @@
             </a:pPr>
             <a:r>
               <a:rPr sz="1400">
-                <a:solidFill>
-                  <a:srgbClr val="BBBBBB"/>
-                </a:solidFill>
-                <a:latin typeface="Calibri"/>
+                <a:solidFill>val="9AA7B6"/&gt;</a:solidFill>
+                <a:latin typeface="Poppins"/>
               </a:rPr>
               <a:t>      a) Le signe =</a:t>
             </a:r>
@@ -6873,10 +7042,8 @@
             </a:pPr>
             <a:r>
               <a:rPr sz="1400">
-                <a:solidFill>
-                  <a:srgbClr val="BBBBBB"/>
-                </a:solidFill>
-                <a:latin typeface="Calibri"/>
+                <a:solidFill>val="9AA7B6"/&gt;</a:solidFill>
+                <a:latin typeface="Poppins"/>
               </a:rPr>
               <a:t>      b) Le signe +</a:t>
             </a:r>
@@ -6889,10 +7056,8 @@
             </a:pPr>
             <a:r>
               <a:rPr sz="1400">
-                <a:solidFill>
-                  <a:srgbClr val="BBBBBB"/>
-                </a:solidFill>
-                <a:latin typeface="Calibri"/>
+                <a:solidFill>val="9AA7B6"/&gt;</a:solidFill>
+                <a:latin typeface="Poppins"/>
               </a:rPr>
               <a:t>      c) La lettre F</a:t>
             </a:r>
@@ -6905,10 +7070,8 @@
             </a:pPr>
             <a:r>
               <a:rPr sz="1500" b="1">
-                <a:solidFill>
-                  <a:srgbClr val="FFFFFF"/>
-                </a:solidFill>
-                <a:latin typeface="Calibri"/>
+                <a:solidFill>val="FFFFFF"/&gt;</a:solidFill>
+                <a:latin typeface="Poppins"/>
               </a:rPr>
               <a:t>2. La fonction MOYENNE(A1:A10) calcule :</a:t>
             </a:r>
@@ -6921,10 +7084,8 @@
             </a:pPr>
             <a:r>
               <a:rPr sz="1400">
-                <a:solidFill>
-                  <a:srgbClr val="BBBBBB"/>
-                </a:solidFill>
-                <a:latin typeface="Calibri"/>
+                <a:solidFill>val="9AA7B6"/&gt;</a:solidFill>
+                <a:latin typeface="Poppins"/>
               </a:rPr>
               <a:t>      a) La somme</a:t>
             </a:r>
@@ -6937,10 +7098,8 @@
             </a:pPr>
             <a:r>
               <a:rPr sz="1400">
-                <a:solidFill>
-                  <a:srgbClr val="BBBBBB"/>
-                </a:solidFill>
-                <a:latin typeface="Calibri"/>
+                <a:solidFill>val="9AA7B6"/&gt;</a:solidFill>
+                <a:latin typeface="Poppins"/>
               </a:rPr>
               <a:t>      b) La moyenne des cellules A1 à A10</a:t>
             </a:r>
@@ -6953,10 +7112,8 @@
             </a:pPr>
             <a:r>
               <a:rPr sz="1400">
-                <a:solidFill>
-                  <a:srgbClr val="BBBBBB"/>
-                </a:solidFill>
-                <a:latin typeface="Calibri"/>
+                <a:solidFill>val="9AA7B6"/&gt;</a:solidFill>
+                <a:latin typeface="Poppins"/>
               </a:rPr>
               <a:t>      c) Le maximum</a:t>
             </a:r>
@@ -6969,10 +7126,8 @@
             </a:pPr>
             <a:r>
               <a:rPr sz="1500" b="1">
-                <a:solidFill>
-                  <a:srgbClr val="FFFFFF"/>
-                </a:solidFill>
-                <a:latin typeface="Calibri"/>
+                <a:solidFill>val="FFFFFF"/&gt;</a:solidFill>
+                <a:latin typeface="Poppins"/>
               </a:rPr>
               <a:t>3. $A$1 est une référence :</a:t>
             </a:r>
@@ -6985,10 +7140,8 @@
             </a:pPr>
             <a:r>
               <a:rPr sz="1400">
-                <a:solidFill>
-                  <a:srgbClr val="BBBBBB"/>
-                </a:solidFill>
-                <a:latin typeface="Calibri"/>
+                <a:solidFill>val="9AA7B6"/&gt;</a:solidFill>
+                <a:latin typeface="Poppins"/>
               </a:rPr>
               <a:t>      a) Relative</a:t>
             </a:r>
@@ -7001,10 +7154,8 @@
             </a:pPr>
             <a:r>
               <a:rPr sz="1400">
-                <a:solidFill>
-                  <a:srgbClr val="BBBBBB"/>
-                </a:solidFill>
-                <a:latin typeface="Calibri"/>
+                <a:solidFill>val="9AA7B6"/&gt;</a:solidFill>
+                <a:latin typeface="Poppins"/>
               </a:rPr>
               <a:t>      b) Absolue</a:t>
             </a:r>
@@ -7017,10 +7168,8 @@
             </a:pPr>
             <a:r>
               <a:rPr sz="1400">
-                <a:solidFill>
-                  <a:srgbClr val="BBBBBB"/>
-                </a:solidFill>
-                <a:latin typeface="Calibri"/>
+                <a:solidFill>val="9AA7B6"/&gt;</a:solidFill>
+                <a:latin typeface="Poppins"/>
               </a:rPr>
               <a:t>      c) Mixte</a:t>
             </a:r>
@@ -7051,6 +7200,47 @@
           </a:prstGeom>
         </p:spPr>
       </p:pic>
+      <p:sp>
+        <p:nvSpPr>
+          <p:cNvPr id="990001" name="Pied de page FLE"/>
+          <p:cNvSpPr>
+            <a:spLocks noGrp="1"/>
+          </p:cNvSpPr>
+          <p:nvPr/>
+        </p:nvSpPr>
+        <p:spPr>
+          <a:xfrm>
+            <a:off x="4343400" y="-329184"/>
+            <a:ext cx="4572000" cy="274320"/>
+          </a:xfrm>
+          <a:prstGeom prst="rect">
+            <a:avLst/>
+          </a:prstGeom>
+        </p:spPr>
+        <p:txBody>
+          <a:bodyPr anchor="b"/>
+          <a:lstStyle/>
+          <a:p>
+            <a:pPr algn="r">
+              <a:defRPr sz="900">
+                <a:solidFill>
+                  <a:srgbClr val="9AA7B6"/>
+                </a:solidFill>
+                <a:latin typeface="Poppins"/>
+              </a:defRPr>
+            </a:pPr>
+            <a:r>
+              <a:rPr lang="fr-FR" sz="900">
+                <a:solidFill>
+                  <a:srgbClr val="9AA7B6"/>
+                </a:solidFill>
+                <a:latin typeface="Poppins"/>
+              </a:rPr>
+              <a:t>Université de Mostaganem — Dr. Madani BELACEL</a:t>
+            </a:r>
+          </a:p>
+        </p:txBody>
+      </p:sp>
     </p:spTree>
   </p:cSld>
   <p:clrMapOvr>
@@ -7064,9 +7254,7 @@
   <p:cSld>
     <p:bg>
       <p:bgPr>
-        <a:solidFill>
-          <a:srgbClr val="0B3D2E"/>
-        </a:solidFill>
+        <a:solidFill>val="004A38"/&gt;</a:solidFill>
         <a:effectLst/>
       </p:bgPr>
     </p:bg>
@@ -7091,9 +7279,7 @@
           <a:prstGeom prst="rect">
             <a:avLst/>
           </a:prstGeom>
-          <a:solidFill>
-            <a:srgbClr val="146B4A"/>
-          </a:solidFill>
+          <a:solidFill>val="007A55"/&gt;</a:solidFill>
           <a:ln>
             <a:noFill/>
           </a:ln>
@@ -7135,9 +7321,7 @@
           <a:prstGeom prst="rect">
             <a:avLst/>
           </a:prstGeom>
-          <a:solidFill>
-            <a:srgbClr val="FFD700"/>
-          </a:solidFill>
+          <a:solidFill>val="F0B429"/&gt;</a:solidFill>
           <a:ln>
             <a:noFill/>
           </a:ln>
@@ -7179,9 +7363,7 @@
           <a:prstGeom prst="rect">
             <a:avLst/>
           </a:prstGeom>
-          <a:solidFill>
-            <a:srgbClr val="FFD700"/>
-          </a:solidFill>
+          <a:solidFill>val="F0B429"/&gt;</a:solidFill>
           <a:ln>
             <a:noFill/>
           </a:ln>
@@ -7223,9 +7405,7 @@
           <a:prstGeom prst="rect">
             <a:avLst/>
           </a:prstGeom>
-          <a:solidFill>
-            <a:srgbClr val="146B4A"/>
-          </a:solidFill>
+          <a:solidFill>val="007A55"/&gt;</a:solidFill>
           <a:ln>
             <a:noFill/>
           </a:ln>
@@ -7278,10 +7458,8 @@
             <a:pPr algn="ctr"/>
             <a:r>
               <a:rPr sz="3000" b="1" i="0">
-                <a:solidFill>
-                  <a:srgbClr val="FFD700"/>
-                </a:solidFill>
-                <a:latin typeface="Calibri"/>
+                <a:solidFill>val="F0B429"/&gt;</a:solidFill>
+                <a:latin typeface="Poppins"/>
               </a:rPr>
               <a:t>Conclusion</a:t>
             </a:r>
@@ -7302,9 +7480,7 @@
           <a:prstGeom prst="rect">
             <a:avLst/>
           </a:prstGeom>
-          <a:solidFill>
-            <a:srgbClr val="146B4A"/>
-          </a:solidFill>
+          <a:solidFill>val="007A55"/&gt;</a:solidFill>
           <a:ln>
             <a:noFill/>
           </a:ln>
@@ -7361,10 +7537,8 @@
             </a:pPr>
             <a:r>
               <a:rPr sz="1800">
-                <a:solidFill>
-                  <a:srgbClr val="FFFFFF"/>
-                </a:solidFill>
-                <a:latin typeface="Calibri"/>
+                <a:solidFill>val="FFFFFF"/&gt;</a:solidFill>
+                <a:latin typeface="Poppins"/>
               </a:rPr>
               <a:t>▪  Excel automatise les calculs et la visualisation des données.</a:t>
             </a:r>
@@ -7377,10 +7551,8 @@
             </a:pPr>
             <a:r>
               <a:rPr sz="1800">
-                <a:solidFill>
-                  <a:srgbClr val="FFFFFF"/>
-                </a:solidFill>
-                <a:latin typeface="Calibri"/>
+                <a:solidFill>val="FFFFFF"/&gt;</a:solidFill>
+                <a:latin typeface="Poppins"/>
               </a:rPr>
               <a:t>▪  Formules, fonctions et graphiques sont les outils clés.</a:t>
             </a:r>
@@ -7393,10 +7565,8 @@
             </a:pPr>
             <a:r>
               <a:rPr sz="1800">
-                <a:solidFill>
-                  <a:srgbClr val="FFFFFF"/>
-                </a:solidFill>
-                <a:latin typeface="Calibri"/>
+                <a:solidFill>val="FFFFFF"/&gt;</a:solidFill>
+                <a:latin typeface="Poppins"/>
               </a:rPr>
               <a:t>▪  Les TCD permettent des analyses professionnelles.</a:t>
             </a:r>
@@ -7409,10 +7579,8 @@
             </a:pPr>
             <a:r>
               <a:rPr sz="1800">
-                <a:solidFill>
-                  <a:srgbClr val="FFFFFF"/>
-                </a:solidFill>
-                <a:latin typeface="Calibri"/>
+                <a:solidFill>val="FFFFFF"/&gt;</a:solidFill>
+                <a:latin typeface="Poppins"/>
               </a:rPr>
               <a:t>▪  Prochain cours : PowerPoint, présentations.</a:t>
             </a:r>
@@ -7443,6 +7611,47 @@
           </a:prstGeom>
         </p:spPr>
       </p:pic>
+      <p:sp>
+        <p:nvSpPr>
+          <p:cNvPr id="990001" name="Pied de page FLE"/>
+          <p:cNvSpPr>
+            <a:spLocks noGrp="1"/>
+          </p:cNvSpPr>
+          <p:nvPr/>
+        </p:nvSpPr>
+        <p:spPr>
+          <a:xfrm>
+            <a:off x="4343400" y="-329184"/>
+            <a:ext cx="4572000" cy="274320"/>
+          </a:xfrm>
+          <a:prstGeom prst="rect">
+            <a:avLst/>
+          </a:prstGeom>
+        </p:spPr>
+        <p:txBody>
+          <a:bodyPr anchor="b"/>
+          <a:lstStyle/>
+          <a:p>
+            <a:pPr algn="r">
+              <a:defRPr sz="900">
+                <a:solidFill>
+                  <a:srgbClr val="9AA7B6"/>
+                </a:solidFill>
+                <a:latin typeface="Poppins"/>
+              </a:defRPr>
+            </a:pPr>
+            <a:r>
+              <a:rPr lang="fr-FR" sz="900">
+                <a:solidFill>
+                  <a:srgbClr val="9AA7B6"/>
+                </a:solidFill>
+                <a:latin typeface="Poppins"/>
+              </a:rPr>
+              <a:t>Université de Mostaganem — Dr. Madani BELACEL</a:t>
+            </a:r>
+          </a:p>
+        </p:txBody>
+      </p:sp>
     </p:spTree>
   </p:cSld>
   <p:clrMapOvr>
@@ -7456,9 +7665,7 @@
   <p:cSld>
     <p:bg>
       <p:bgPr>
-        <a:solidFill>
-          <a:srgbClr val="0B3D2E"/>
-        </a:solidFill>
+        <a:solidFill>val="004A38"/&gt;</a:solidFill>
         <a:effectLst/>
       </p:bgPr>
     </p:bg>
@@ -7483,9 +7690,7 @@
           <a:prstGeom prst="rect">
             <a:avLst/>
           </a:prstGeom>
-          <a:solidFill>
-            <a:srgbClr val="146B4A"/>
-          </a:solidFill>
+          <a:solidFill>val="007A55"/&gt;</a:solidFill>
           <a:ln>
             <a:noFill/>
           </a:ln>
@@ -7527,9 +7732,7 @@
           <a:prstGeom prst="rect">
             <a:avLst/>
           </a:prstGeom>
-          <a:solidFill>
-            <a:srgbClr val="FFD700"/>
-          </a:solidFill>
+          <a:solidFill>val="F0B429"/&gt;</a:solidFill>
           <a:ln>
             <a:noFill/>
           </a:ln>
@@ -7571,9 +7774,7 @@
           <a:prstGeom prst="rect">
             <a:avLst/>
           </a:prstGeom>
-          <a:solidFill>
-            <a:srgbClr val="FFD700"/>
-          </a:solidFill>
+          <a:solidFill>val="F0B429"/&gt;</a:solidFill>
           <a:ln>
             <a:noFill/>
           </a:ln>
@@ -7615,9 +7816,7 @@
           <a:prstGeom prst="rect">
             <a:avLst/>
           </a:prstGeom>
-          <a:solidFill>
-            <a:srgbClr val="146B4A"/>
-          </a:solidFill>
+          <a:solidFill>val="007A55"/&gt;</a:solidFill>
           <a:ln>
             <a:noFill/>
           </a:ln>
@@ -7670,10 +7869,8 @@
             <a:pPr algn="ctr"/>
             <a:r>
               <a:rPr sz="3200" b="1" i="0">
-                <a:solidFill>
-                  <a:srgbClr val="FFD700"/>
-                </a:solidFill>
-                <a:latin typeface="Calibri"/>
+                <a:solidFill>val="F0B429"/&gt;</a:solidFill>
+                <a:latin typeface="Poppins"/>
               </a:rPr>
               <a:t>Plan du cours</a:t>
             </a:r>
@@ -7709,10 +7906,8 @@
             </a:pPr>
             <a:r>
               <a:rPr sz="1900">
-                <a:solidFill>
-                  <a:srgbClr val="FFFFFF"/>
-                </a:solidFill>
-                <a:latin typeface="Calibri"/>
+                <a:solidFill>val="FFFFFF"/&gt;</a:solidFill>
+                <a:latin typeface="Poppins"/>
               </a:rPr>
               <a:t>▪  1. Qu'est-ce qu'un tableur ?</a:t>
             </a:r>
@@ -7725,10 +7920,8 @@
             </a:pPr>
             <a:r>
               <a:rPr sz="1900">
-                <a:solidFill>
-                  <a:srgbClr val="FFFFFF"/>
-                </a:solidFill>
-                <a:latin typeface="Calibri"/>
+                <a:solidFill>val="FFFFFF"/&gt;</a:solidFill>
+                <a:latin typeface="Poppins"/>
               </a:rPr>
               <a:t>▪  2. Classeur, feuilles et cellules</a:t>
             </a:r>
@@ -7741,10 +7934,8 @@
             </a:pPr>
             <a:r>
               <a:rPr sz="1900">
-                <a:solidFill>
-                  <a:srgbClr val="FFFFFF"/>
-                </a:solidFill>
-                <a:latin typeface="Calibri"/>
+                <a:solidFill>val="FFFFFF"/&gt;</a:solidFill>
+                <a:latin typeface="Poppins"/>
               </a:rPr>
               <a:t>▪  3. Formules et fonctions</a:t>
             </a:r>
@@ -7757,10 +7948,8 @@
             </a:pPr>
             <a:r>
               <a:rPr sz="1900">
-                <a:solidFill>
-                  <a:srgbClr val="FFFFFF"/>
-                </a:solidFill>
-                <a:latin typeface="Calibri"/>
+                <a:solidFill>val="FFFFFF"/&gt;</a:solidFill>
+                <a:latin typeface="Poppins"/>
               </a:rPr>
               <a:t>▪  4. Mise en forme et tableaux</a:t>
             </a:r>
@@ -7773,10 +7962,8 @@
             </a:pPr>
             <a:r>
               <a:rPr sz="1900">
-                <a:solidFill>
-                  <a:srgbClr val="FFFFFF"/>
-                </a:solidFill>
-                <a:latin typeface="Calibri"/>
+                <a:solidFill>val="FFFFFF"/&gt;</a:solidFill>
+                <a:latin typeface="Poppins"/>
               </a:rPr>
               <a:t>▪  5. Graphiques</a:t>
             </a:r>
@@ -7789,10 +7976,8 @@
             </a:pPr>
             <a:r>
               <a:rPr sz="1900">
-                <a:solidFill>
-                  <a:srgbClr val="FFFFFF"/>
-                </a:solidFill>
-                <a:latin typeface="Calibri"/>
+                <a:solidFill>val="FFFFFF"/&gt;</a:solidFill>
+                <a:latin typeface="Poppins"/>
               </a:rPr>
               <a:t>▪  6. Analyse des données</a:t>
             </a:r>
@@ -7805,12 +7990,51 @@
             </a:pPr>
             <a:r>
               <a:rPr sz="1900">
-                <a:solidFill>
-                  <a:srgbClr val="FFFFFF"/>
-                </a:solidFill>
-                <a:latin typeface="Calibri"/>
+                <a:solidFill>val="FFFFFF"/&gt;</a:solidFill>
+                <a:latin typeface="Poppins"/>
               </a:rPr>
               <a:t>▪  7. Impression et bonnes pratiques</a:t>
+            </a:r>
+          </a:p>
+        </p:txBody>
+      </p:sp>
+      <p:sp>
+        <p:nvSpPr>
+          <p:cNvPr id="990001" name="Pied de page FLE"/>
+          <p:cNvSpPr>
+            <a:spLocks noGrp="1"/>
+          </p:cNvSpPr>
+          <p:nvPr/>
+        </p:nvSpPr>
+        <p:spPr>
+          <a:xfrm>
+            <a:off x="4343400" y="-329184"/>
+            <a:ext cx="4572000" cy="274320"/>
+          </a:xfrm>
+          <a:prstGeom prst="rect">
+            <a:avLst/>
+          </a:prstGeom>
+        </p:spPr>
+        <p:txBody>
+          <a:bodyPr anchor="b"/>
+          <a:lstStyle/>
+          <a:p>
+            <a:pPr algn="r">
+              <a:defRPr sz="900">
+                <a:solidFill>
+                  <a:srgbClr val="9AA7B6"/>
+                </a:solidFill>
+                <a:latin typeface="Poppins"/>
+              </a:defRPr>
+            </a:pPr>
+            <a:r>
+              <a:rPr lang="fr-FR" sz="900">
+                <a:solidFill>
+                  <a:srgbClr val="9AA7B6"/>
+                </a:solidFill>
+                <a:latin typeface="Poppins"/>
+              </a:rPr>
+              <a:t>Université de Mostaganem — Dr. Madani BELACEL</a:t>
             </a:r>
           </a:p>
         </p:txBody>
@@ -7828,9 +8052,7 @@
   <p:cSld>
     <p:bg>
       <p:bgPr>
-        <a:solidFill>
-          <a:srgbClr val="0B3D2E"/>
-        </a:solidFill>
+        <a:solidFill>val="004A38"/&gt;</a:solidFill>
         <a:effectLst/>
       </p:bgPr>
     </p:bg>
@@ -7855,9 +8077,7 @@
           <a:prstGeom prst="rect">
             <a:avLst/>
           </a:prstGeom>
-          <a:solidFill>
-            <a:srgbClr val="146B4A"/>
-          </a:solidFill>
+          <a:solidFill>val="007A55"/&gt;</a:solidFill>
           <a:ln>
             <a:noFill/>
           </a:ln>
@@ -7899,9 +8119,7 @@
           <a:prstGeom prst="rect">
             <a:avLst/>
           </a:prstGeom>
-          <a:solidFill>
-            <a:srgbClr val="FFD700"/>
-          </a:solidFill>
+          <a:solidFill>val="F0B429"/&gt;</a:solidFill>
           <a:ln>
             <a:noFill/>
           </a:ln>
@@ -7943,9 +8161,7 @@
           <a:prstGeom prst="rect">
             <a:avLst/>
           </a:prstGeom>
-          <a:solidFill>
-            <a:srgbClr val="FFD700"/>
-          </a:solidFill>
+          <a:solidFill>val="F0B429"/&gt;</a:solidFill>
           <a:ln>
             <a:noFill/>
           </a:ln>
@@ -7987,9 +8203,7 @@
           <a:prstGeom prst="rect">
             <a:avLst/>
           </a:prstGeom>
-          <a:solidFill>
-            <a:srgbClr val="146B4A"/>
-          </a:solidFill>
+          <a:solidFill>val="007A55"/&gt;</a:solidFill>
           <a:ln>
             <a:noFill/>
           </a:ln>
@@ -8042,10 +8256,8 @@
             <a:pPr algn="l"/>
             <a:r>
               <a:rPr sz="3000" b="1" i="0">
-                <a:solidFill>
-                  <a:srgbClr val="FFD700"/>
-                </a:solidFill>
-                <a:latin typeface="Calibri"/>
+                <a:solidFill>val="F0B429"/&gt;</a:solidFill>
+                <a:latin typeface="Poppins"/>
               </a:rPr>
               <a:t>Références</a:t>
             </a:r>
@@ -8066,9 +8278,7 @@
           <a:prstGeom prst="rect">
             <a:avLst/>
           </a:prstGeom>
-          <a:solidFill>
-            <a:srgbClr val="146B4A"/>
-          </a:solidFill>
+          <a:solidFill>val="007A55"/&gt;</a:solidFill>
           <a:ln>
             <a:noFill/>
           </a:ln>
@@ -8125,10 +8335,8 @@
             </a:pPr>
             <a:r>
               <a:rPr sz="1500">
-                <a:solidFill>
-                  <a:srgbClr val="BBBBBB"/>
-                </a:solidFill>
-                <a:latin typeface="Calibri"/>
+                <a:solidFill>val="9AA7B6"/&gt;</a:solidFill>
+                <a:latin typeface="Poppins"/>
               </a:rPr>
               <a:t>- Microsoft Support - Guide Excel.</a:t>
             </a:r>
@@ -8141,10 +8349,8 @@
             </a:pPr>
             <a:r>
               <a:rPr sz="1500">
-                <a:solidFill>
-                  <a:srgbClr val="BBBBBB"/>
-                </a:solidFill>
-                <a:latin typeface="Calibri"/>
+                <a:solidFill>val="9AA7B6"/&gt;</a:solidFill>
+                <a:latin typeface="Poppins"/>
               </a:rPr>
               <a:t>- J. Walkenbach, « Excel 2019 Bible », Wiley.</a:t>
             </a:r>
@@ -8157,10 +8363,8 @@
             </a:pPr>
             <a:r>
               <a:rPr sz="1500">
-                <a:solidFill>
-                  <a:srgbClr val="BBBBBB"/>
-                </a:solidFill>
-                <a:latin typeface="Calibri"/>
+                <a:solidFill>val="9AA7B6"/&gt;</a:solidFill>
+                <a:latin typeface="Poppins"/>
               </a:rPr>
               <a:t>- Supports de cours Module TIC, Université de Mostaganem.</a:t>
             </a:r>
@@ -8173,10 +8377,8 @@
             </a:pPr>
             <a:r>
               <a:rPr sz="1500">
-                <a:solidFill>
-                  <a:srgbClr val="BBBBBB"/>
-                </a:solidFill>
-                <a:latin typeface="Calibri"/>
+                <a:solidFill>val="9AA7B6"/&gt;</a:solidFill>
+                <a:latin typeface="Poppins"/>
               </a:rPr>
               <a:t>- www.excel-pratique.com</a:t>
             </a:r>
@@ -8207,6 +8409,47 @@
           </a:prstGeom>
         </p:spPr>
       </p:pic>
+      <p:sp>
+        <p:nvSpPr>
+          <p:cNvPr id="990001" name="Pied de page FLE"/>
+          <p:cNvSpPr>
+            <a:spLocks noGrp="1"/>
+          </p:cNvSpPr>
+          <p:nvPr/>
+        </p:nvSpPr>
+        <p:spPr>
+          <a:xfrm>
+            <a:off x="4343400" y="-329184"/>
+            <a:ext cx="4572000" cy="274320"/>
+          </a:xfrm>
+          <a:prstGeom prst="rect">
+            <a:avLst/>
+          </a:prstGeom>
+        </p:spPr>
+        <p:txBody>
+          <a:bodyPr anchor="b"/>
+          <a:lstStyle/>
+          <a:p>
+            <a:pPr algn="r">
+              <a:defRPr sz="900">
+                <a:solidFill>
+                  <a:srgbClr val="9AA7B6"/>
+                </a:solidFill>
+                <a:latin typeface="Poppins"/>
+              </a:defRPr>
+            </a:pPr>
+            <a:r>
+              <a:rPr lang="fr-FR" sz="900">
+                <a:solidFill>
+                  <a:srgbClr val="9AA7B6"/>
+                </a:solidFill>
+                <a:latin typeface="Poppins"/>
+              </a:rPr>
+              <a:t>Université de Mostaganem — Dr. Madani BELACEL</a:t>
+            </a:r>
+          </a:p>
+        </p:txBody>
+      </p:sp>
     </p:spTree>
   </p:cSld>
   <p:clrMapOvr>
@@ -8220,9 +8463,7 @@
   <p:cSld>
     <p:bg>
       <p:bgPr>
-        <a:solidFill>
-          <a:srgbClr val="0B3D2E"/>
-        </a:solidFill>
+        <a:solidFill>val="004A38"/&gt;</a:solidFill>
         <a:effectLst/>
       </p:bgPr>
     </p:bg>
@@ -8247,9 +8488,7 @@
           <a:prstGeom prst="rect">
             <a:avLst/>
           </a:prstGeom>
-          <a:solidFill>
-            <a:srgbClr val="146B4A"/>
-          </a:solidFill>
+          <a:solidFill>val="007A55"/&gt;</a:solidFill>
           <a:ln>
             <a:noFill/>
           </a:ln>
@@ -8291,9 +8530,7 @@
           <a:prstGeom prst="rect">
             <a:avLst/>
           </a:prstGeom>
-          <a:solidFill>
-            <a:srgbClr val="FFD700"/>
-          </a:solidFill>
+          <a:solidFill>val="F0B429"/&gt;</a:solidFill>
           <a:ln>
             <a:noFill/>
           </a:ln>
@@ -8335,9 +8572,7 @@
           <a:prstGeom prst="rect">
             <a:avLst/>
           </a:prstGeom>
-          <a:solidFill>
-            <a:srgbClr val="FFD700"/>
-          </a:solidFill>
+          <a:solidFill>val="F0B429"/&gt;</a:solidFill>
           <a:ln>
             <a:noFill/>
           </a:ln>
@@ -8379,9 +8614,7 @@
           <a:prstGeom prst="rect">
             <a:avLst/>
           </a:prstGeom>
-          <a:solidFill>
-            <a:srgbClr val="146B4A"/>
-          </a:solidFill>
+          <a:solidFill>val="007A55"/&gt;</a:solidFill>
           <a:ln>
             <a:noFill/>
           </a:ln>
@@ -8423,9 +8656,7 @@
           <a:prstGeom prst="rect">
             <a:avLst/>
           </a:prstGeom>
-          <a:solidFill>
-            <a:srgbClr val="FFD700"/>
-          </a:solidFill>
+          <a:solidFill>val="F0B429"/&gt;</a:solidFill>
           <a:ln>
             <a:noFill/>
           </a:ln>
@@ -8478,10 +8709,8 @@
             <a:pPr algn="ctr"/>
             <a:r>
               <a:rPr sz="3800" b="1" i="0">
-                <a:solidFill>
-                  <a:srgbClr val="FFD700"/>
-                </a:solidFill>
-                <a:latin typeface="Calibri"/>
+                <a:solidFill>val="F0B429"/&gt;</a:solidFill>
+                <a:latin typeface="Poppins"/>
               </a:rPr>
               <a:t>Merci de votre attention !</a:t>
             </a:r>
@@ -8513,10 +8742,8 @@
             <a:pPr algn="ctr"/>
             <a:r>
               <a:rPr sz="2600" b="0" i="0">
-                <a:solidFill>
-                  <a:srgbClr val="FFFFFF"/>
-                </a:solidFill>
-                <a:latin typeface="Calibri"/>
+                <a:solidFill>val="FFFFFF"/&gt;</a:solidFill>
+                <a:latin typeface="Poppins"/>
               </a:rPr>
               <a:t>Des questions ?</a:t>
             </a:r>
@@ -8548,10 +8775,8 @@
             <a:pPr algn="ctr"/>
             <a:r>
               <a:rPr sz="1600" b="0" i="0">
-                <a:solidFill>
-                  <a:srgbClr val="BBBBBB"/>
-                </a:solidFill>
-                <a:latin typeface="Calibri"/>
+                <a:solidFill>val="9AA7B6"/&gt;</a:solidFill>
+                <a:latin typeface="Poppins"/>
               </a:rPr>
               <a:t>Dr. BELACEL Madani</a:t>
             </a:r>
@@ -8582,6 +8807,47 @@
           </a:prstGeom>
         </p:spPr>
       </p:pic>
+      <p:sp>
+        <p:nvSpPr>
+          <p:cNvPr id="990001" name="Pied de page FLE"/>
+          <p:cNvSpPr>
+            <a:spLocks noGrp="1"/>
+          </p:cNvSpPr>
+          <p:nvPr/>
+        </p:nvSpPr>
+        <p:spPr>
+          <a:xfrm>
+            <a:off x="4343400" y="-329184"/>
+            <a:ext cx="4572000" cy="274320"/>
+          </a:xfrm>
+          <a:prstGeom prst="rect">
+            <a:avLst/>
+          </a:prstGeom>
+        </p:spPr>
+        <p:txBody>
+          <a:bodyPr anchor="b"/>
+          <a:lstStyle/>
+          <a:p>
+            <a:pPr algn="r">
+              <a:defRPr sz="900">
+                <a:solidFill>
+                  <a:srgbClr val="9AA7B6"/>
+                </a:solidFill>
+                <a:latin typeface="Poppins"/>
+              </a:defRPr>
+            </a:pPr>
+            <a:r>
+              <a:rPr lang="fr-FR" sz="900">
+                <a:solidFill>
+                  <a:srgbClr val="9AA7B6"/>
+                </a:solidFill>
+                <a:latin typeface="Poppins"/>
+              </a:rPr>
+              <a:t>Université de Mostaganem — Dr. Madani BELACEL</a:t>
+            </a:r>
+          </a:p>
+        </p:txBody>
+      </p:sp>
     </p:spTree>
   </p:cSld>
   <p:clrMapOvr>
@@ -8595,9 +8861,7 @@
   <p:cSld>
     <p:bg>
       <p:bgPr>
-        <a:solidFill>
-          <a:srgbClr val="0B3D2E"/>
-        </a:solidFill>
+        <a:solidFill>val="004A38"/&gt;</a:solidFill>
         <a:effectLst/>
       </p:bgPr>
     </p:bg>
@@ -8622,9 +8886,7 @@
           <a:prstGeom prst="rect">
             <a:avLst/>
           </a:prstGeom>
-          <a:solidFill>
-            <a:srgbClr val="146B4A"/>
-          </a:solidFill>
+          <a:solidFill>val="007A55"/&gt;</a:solidFill>
           <a:ln>
             <a:noFill/>
           </a:ln>
@@ -8666,9 +8928,7 @@
           <a:prstGeom prst="rect">
             <a:avLst/>
           </a:prstGeom>
-          <a:solidFill>
-            <a:srgbClr val="FFD700"/>
-          </a:solidFill>
+          <a:solidFill>val="F0B429"/&gt;</a:solidFill>
           <a:ln>
             <a:noFill/>
           </a:ln>
@@ -8710,9 +8970,7 @@
           <a:prstGeom prst="rect">
             <a:avLst/>
           </a:prstGeom>
-          <a:solidFill>
-            <a:srgbClr val="FFD700"/>
-          </a:solidFill>
+          <a:solidFill>val="F0B429"/&gt;</a:solidFill>
           <a:ln>
             <a:noFill/>
           </a:ln>
@@ -8754,9 +9012,7 @@
           <a:prstGeom prst="rect">
             <a:avLst/>
           </a:prstGeom>
-          <a:solidFill>
-            <a:srgbClr val="146B4A"/>
-          </a:solidFill>
+          <a:solidFill>val="007A55"/&gt;</a:solidFill>
           <a:ln>
             <a:noFill/>
           </a:ln>
@@ -8798,9 +9054,7 @@
           <a:prstGeom prst="rect">
             <a:avLst/>
           </a:prstGeom>
-          <a:solidFill>
-            <a:srgbClr val="146B4A"/>
-          </a:solidFill>
+          <a:solidFill>val="007A55"/&gt;</a:solidFill>
           <a:ln>
             <a:noFill/>
           </a:ln>
@@ -8853,10 +9107,8 @@
             <a:pPr algn="ctr"/>
             <a:r>
               <a:rPr sz="2200" b="1" i="0">
-                <a:solidFill>
-                  <a:srgbClr val="BBBBBB"/>
-                </a:solidFill>
-                <a:latin typeface="Calibri"/>
+                <a:solidFill>val="9AA7B6"/&gt;</a:solidFill>
+                <a:latin typeface="Poppins"/>
               </a:rPr>
               <a:t>Section 1</a:t>
             </a:r>
@@ -8888,10 +9140,8 @@
             <a:pPr algn="ctr"/>
             <a:r>
               <a:rPr sz="2800" b="1" i="0">
-                <a:solidFill>
-                  <a:srgbClr val="FFD700"/>
-                </a:solidFill>
-                <a:latin typeface="Calibri"/>
+                <a:solidFill>val="F0B429"/&gt;</a:solidFill>
+                <a:latin typeface="Poppins"/>
               </a:rPr>
               <a:t>Qu'est-ce qu'un tableur ?</a:t>
             </a:r>
@@ -8922,6 +9172,47 @@
           </a:prstGeom>
         </p:spPr>
       </p:pic>
+      <p:sp>
+        <p:nvSpPr>
+          <p:cNvPr id="990001" name="Pied de page FLE"/>
+          <p:cNvSpPr>
+            <a:spLocks noGrp="1"/>
+          </p:cNvSpPr>
+          <p:nvPr/>
+        </p:nvSpPr>
+        <p:spPr>
+          <a:xfrm>
+            <a:off x="4343400" y="-329184"/>
+            <a:ext cx="4572000" cy="274320"/>
+          </a:xfrm>
+          <a:prstGeom prst="rect">
+            <a:avLst/>
+          </a:prstGeom>
+        </p:spPr>
+        <p:txBody>
+          <a:bodyPr anchor="b"/>
+          <a:lstStyle/>
+          <a:p>
+            <a:pPr algn="r">
+              <a:defRPr sz="900">
+                <a:solidFill>
+                  <a:srgbClr val="9AA7B6"/>
+                </a:solidFill>
+                <a:latin typeface="Poppins"/>
+              </a:defRPr>
+            </a:pPr>
+            <a:r>
+              <a:rPr lang="fr-FR" sz="900">
+                <a:solidFill>
+                  <a:srgbClr val="9AA7B6"/>
+                </a:solidFill>
+                <a:latin typeface="Poppins"/>
+              </a:rPr>
+              <a:t>Université de Mostaganem — Dr. Madani BELACEL</a:t>
+            </a:r>
+          </a:p>
+        </p:txBody>
+      </p:sp>
     </p:spTree>
   </p:cSld>
   <p:clrMapOvr>
@@ -8935,9 +9226,7 @@
   <p:cSld>
     <p:bg>
       <p:bgPr>
-        <a:solidFill>
-          <a:srgbClr val="0B3D2E"/>
-        </a:solidFill>
+        <a:solidFill>val="004A38"/&gt;</a:solidFill>
         <a:effectLst/>
       </p:bgPr>
     </p:bg>
@@ -8962,9 +9251,7 @@
           <a:prstGeom prst="rect">
             <a:avLst/>
           </a:prstGeom>
-          <a:solidFill>
-            <a:srgbClr val="146B4A"/>
-          </a:solidFill>
+          <a:solidFill>val="007A55"/&gt;</a:solidFill>
           <a:ln>
             <a:noFill/>
           </a:ln>
@@ -9006,9 +9293,7 @@
           <a:prstGeom prst="rect">
             <a:avLst/>
           </a:prstGeom>
-          <a:solidFill>
-            <a:srgbClr val="FFD700"/>
-          </a:solidFill>
+          <a:solidFill>val="F0B429"/&gt;</a:solidFill>
           <a:ln>
             <a:noFill/>
           </a:ln>
@@ -9050,9 +9335,7 @@
           <a:prstGeom prst="rect">
             <a:avLst/>
           </a:prstGeom>
-          <a:solidFill>
-            <a:srgbClr val="FFD700"/>
-          </a:solidFill>
+          <a:solidFill>val="F0B429"/&gt;</a:solidFill>
           <a:ln>
             <a:noFill/>
           </a:ln>
@@ -9094,9 +9377,7 @@
           <a:prstGeom prst="rect">
             <a:avLst/>
           </a:prstGeom>
-          <a:solidFill>
-            <a:srgbClr val="146B4A"/>
-          </a:solidFill>
+          <a:solidFill>val="007A55"/&gt;</a:solidFill>
           <a:ln>
             <a:noFill/>
           </a:ln>
@@ -9149,10 +9430,8 @@
             <a:pPr algn="l"/>
             <a:r>
               <a:rPr sz="2400" b="1" i="0">
-                <a:solidFill>
-                  <a:srgbClr val="FFD700"/>
-                </a:solidFill>
-                <a:latin typeface="Calibri"/>
+                <a:solidFill>val="F0B429"/&gt;</a:solidFill>
+                <a:latin typeface="Poppins"/>
               </a:rPr>
               <a:t>1 - Qu'est-ce qu'un tableur ?</a:t>
             </a:r>
@@ -9173,9 +9452,7 @@
           <a:prstGeom prst="rect">
             <a:avLst/>
           </a:prstGeom>
-          <a:solidFill>
-            <a:srgbClr val="146B4A"/>
-          </a:solidFill>
+          <a:solidFill>val="007A55"/&gt;</a:solidFill>
           <a:ln>
             <a:noFill/>
           </a:ln>
@@ -9232,10 +9509,8 @@
             </a:pPr>
             <a:r>
               <a:rPr sz="1800">
-                <a:solidFill>
-                  <a:srgbClr val="FFFFFF"/>
-                </a:solidFill>
-                <a:latin typeface="Calibri"/>
+                <a:solidFill>val="FFFFFF"/&gt;</a:solidFill>
+                <a:latin typeface="Poppins"/>
               </a:rPr>
               <a:t>▪  Logiciel de calcul automatique sur des feuilles de calcul.</a:t>
             </a:r>
@@ -9248,10 +9523,8 @@
             </a:pPr>
             <a:r>
               <a:rPr sz="1800">
-                <a:solidFill>
-                  <a:srgbClr val="FFFFFF"/>
-                </a:solidFill>
-                <a:latin typeface="Calibri"/>
+                <a:solidFill>val="FFFFFF"/&gt;</a:solidFill>
+                <a:latin typeface="Poppins"/>
               </a:rPr>
               <a:t>▪  Grille de cellules organisées en lignes et colonnes.</a:t>
             </a:r>
@@ -9264,10 +9537,8 @@
             </a:pPr>
             <a:r>
               <a:rPr sz="1800">
-                <a:solidFill>
-                  <a:srgbClr val="FFFFFF"/>
-                </a:solidFill>
-                <a:latin typeface="Calibri"/>
+                <a:solidFill>val="FFFFFF"/&gt;</a:solidFill>
+                <a:latin typeface="Poppins"/>
               </a:rPr>
               <a:t>▪  Recalcul automatique quand les données changent.</a:t>
             </a:r>
@@ -9280,10 +9551,8 @@
             </a:pPr>
             <a:r>
               <a:rPr sz="1800">
-                <a:solidFill>
-                  <a:srgbClr val="FFFFFF"/>
-                </a:solidFill>
-                <a:latin typeface="Calibri"/>
+                <a:solidFill>val="FFFFFF"/&gt;</a:solidFill>
+                <a:latin typeface="Poppins"/>
               </a:rPr>
               <a:t>▪  Usages : budgets, notes, statistiques, factures.</a:t>
             </a:r>
@@ -9314,6 +9583,47 @@
           </a:prstGeom>
         </p:spPr>
       </p:pic>
+      <p:sp>
+        <p:nvSpPr>
+          <p:cNvPr id="990001" name="Pied de page FLE"/>
+          <p:cNvSpPr>
+            <a:spLocks noGrp="1"/>
+          </p:cNvSpPr>
+          <p:nvPr/>
+        </p:nvSpPr>
+        <p:spPr>
+          <a:xfrm>
+            <a:off x="4343400" y="-329184"/>
+            <a:ext cx="4572000" cy="274320"/>
+          </a:xfrm>
+          <a:prstGeom prst="rect">
+            <a:avLst/>
+          </a:prstGeom>
+        </p:spPr>
+        <p:txBody>
+          <a:bodyPr anchor="b"/>
+          <a:lstStyle/>
+          <a:p>
+            <a:pPr algn="r">
+              <a:defRPr sz="900">
+                <a:solidFill>
+                  <a:srgbClr val="9AA7B6"/>
+                </a:solidFill>
+                <a:latin typeface="Poppins"/>
+              </a:defRPr>
+            </a:pPr>
+            <a:r>
+              <a:rPr lang="fr-FR" sz="900">
+                <a:solidFill>
+                  <a:srgbClr val="9AA7B6"/>
+                </a:solidFill>
+                <a:latin typeface="Poppins"/>
+              </a:rPr>
+              <a:t>Université de Mostaganem — Dr. Madani BELACEL</a:t>
+            </a:r>
+          </a:p>
+        </p:txBody>
+      </p:sp>
     </p:spTree>
   </p:cSld>
   <p:clrMapOvr>
@@ -9327,9 +9637,7 @@
   <p:cSld>
     <p:bg>
       <p:bgPr>
-        <a:solidFill>
-          <a:srgbClr val="0B3D2E"/>
-        </a:solidFill>
+        <a:solidFill>val="004A38"/&gt;</a:solidFill>
         <a:effectLst/>
       </p:bgPr>
     </p:bg>
@@ -9354,9 +9662,7 @@
           <a:prstGeom prst="rect">
             <a:avLst/>
           </a:prstGeom>
-          <a:solidFill>
-            <a:srgbClr val="146B4A"/>
-          </a:solidFill>
+          <a:solidFill>val="007A55"/&gt;</a:solidFill>
           <a:ln>
             <a:noFill/>
           </a:ln>
@@ -9398,9 +9704,7 @@
           <a:prstGeom prst="rect">
             <a:avLst/>
           </a:prstGeom>
-          <a:solidFill>
-            <a:srgbClr val="FFD700"/>
-          </a:solidFill>
+          <a:solidFill>val="F0B429"/&gt;</a:solidFill>
           <a:ln>
             <a:noFill/>
           </a:ln>
@@ -9442,9 +9746,7 @@
           <a:prstGeom prst="rect">
             <a:avLst/>
           </a:prstGeom>
-          <a:solidFill>
-            <a:srgbClr val="FFD700"/>
-          </a:solidFill>
+          <a:solidFill>val="F0B429"/&gt;</a:solidFill>
           <a:ln>
             <a:noFill/>
           </a:ln>
@@ -9486,9 +9788,7 @@
           <a:prstGeom prst="rect">
             <a:avLst/>
           </a:prstGeom>
-          <a:solidFill>
-            <a:srgbClr val="146B4A"/>
-          </a:solidFill>
+          <a:solidFill>val="007A55"/&gt;</a:solidFill>
           <a:ln>
             <a:noFill/>
           </a:ln>
@@ -9530,9 +9830,7 @@
           <a:prstGeom prst="rect">
             <a:avLst/>
           </a:prstGeom>
-          <a:solidFill>
-            <a:srgbClr val="146B4A"/>
-          </a:solidFill>
+          <a:solidFill>val="007A55"/&gt;</a:solidFill>
           <a:ln>
             <a:noFill/>
           </a:ln>
@@ -9585,10 +9883,8 @@
             <a:pPr algn="ctr"/>
             <a:r>
               <a:rPr sz="2200" b="1" i="0">
-                <a:solidFill>
-                  <a:srgbClr val="BBBBBB"/>
-                </a:solidFill>
-                <a:latin typeface="Calibri"/>
+                <a:solidFill>val="9AA7B6"/&gt;</a:solidFill>
+                <a:latin typeface="Poppins"/>
               </a:rPr>
               <a:t>Section 2</a:t>
             </a:r>
@@ -9620,10 +9916,8 @@
             <a:pPr algn="ctr"/>
             <a:r>
               <a:rPr sz="2800" b="1" i="0">
-                <a:solidFill>
-                  <a:srgbClr val="FFD700"/>
-                </a:solidFill>
-                <a:latin typeface="Calibri"/>
+                <a:solidFill>val="F0B429"/&gt;</a:solidFill>
+                <a:latin typeface="Poppins"/>
               </a:rPr>
               <a:t>Classeur, feuilles et cellules</a:t>
             </a:r>
@@ -9654,6 +9948,47 @@
           </a:prstGeom>
         </p:spPr>
       </p:pic>
+      <p:sp>
+        <p:nvSpPr>
+          <p:cNvPr id="990001" name="Pied de page FLE"/>
+          <p:cNvSpPr>
+            <a:spLocks noGrp="1"/>
+          </p:cNvSpPr>
+          <p:nvPr/>
+        </p:nvSpPr>
+        <p:spPr>
+          <a:xfrm>
+            <a:off x="4343400" y="-329184"/>
+            <a:ext cx="4572000" cy="274320"/>
+          </a:xfrm>
+          <a:prstGeom prst="rect">
+            <a:avLst/>
+          </a:prstGeom>
+        </p:spPr>
+        <p:txBody>
+          <a:bodyPr anchor="b"/>
+          <a:lstStyle/>
+          <a:p>
+            <a:pPr algn="r">
+              <a:defRPr sz="900">
+                <a:solidFill>
+                  <a:srgbClr val="9AA7B6"/>
+                </a:solidFill>
+                <a:latin typeface="Poppins"/>
+              </a:defRPr>
+            </a:pPr>
+            <a:r>
+              <a:rPr lang="fr-FR" sz="900">
+                <a:solidFill>
+                  <a:srgbClr val="9AA7B6"/>
+                </a:solidFill>
+                <a:latin typeface="Poppins"/>
+              </a:rPr>
+              <a:t>Université de Mostaganem — Dr. Madani BELACEL</a:t>
+            </a:r>
+          </a:p>
+        </p:txBody>
+      </p:sp>
     </p:spTree>
   </p:cSld>
   <p:clrMapOvr>
@@ -9667,9 +10002,7 @@
   <p:cSld>
     <p:bg>
       <p:bgPr>
-        <a:solidFill>
-          <a:srgbClr val="0B3D2E"/>
-        </a:solidFill>
+        <a:solidFill>val="004A38"/&gt;</a:solidFill>
         <a:effectLst/>
       </p:bgPr>
     </p:bg>
@@ -9694,9 +10027,7 @@
           <a:prstGeom prst="rect">
             <a:avLst/>
           </a:prstGeom>
-          <a:solidFill>
-            <a:srgbClr val="146B4A"/>
-          </a:solidFill>
+          <a:solidFill>val="007A55"/&gt;</a:solidFill>
           <a:ln>
             <a:noFill/>
           </a:ln>
@@ -9738,9 +10069,7 @@
           <a:prstGeom prst="rect">
             <a:avLst/>
           </a:prstGeom>
-          <a:solidFill>
-            <a:srgbClr val="FFD700"/>
-          </a:solidFill>
+          <a:solidFill>val="F0B429"/&gt;</a:solidFill>
           <a:ln>
             <a:noFill/>
           </a:ln>
@@ -9782,9 +10111,7 @@
           <a:prstGeom prst="rect">
             <a:avLst/>
           </a:prstGeom>
-          <a:solidFill>
-            <a:srgbClr val="FFD700"/>
-          </a:solidFill>
+          <a:solidFill>val="F0B429"/&gt;</a:solidFill>
           <a:ln>
             <a:noFill/>
           </a:ln>
@@ -9826,9 +10153,7 @@
           <a:prstGeom prst="rect">
             <a:avLst/>
           </a:prstGeom>
-          <a:solidFill>
-            <a:srgbClr val="146B4A"/>
-          </a:solidFill>
+          <a:solidFill>val="007A55"/&gt;</a:solidFill>
           <a:ln>
             <a:noFill/>
           </a:ln>
@@ -9881,10 +10206,8 @@
             <a:pPr algn="l"/>
             <a:r>
               <a:rPr sz="2400" b="1" i="0">
-                <a:solidFill>
-                  <a:srgbClr val="FFD700"/>
-                </a:solidFill>
-                <a:latin typeface="Calibri"/>
+                <a:solidFill>val="F0B429"/&gt;</a:solidFill>
+                <a:latin typeface="Poppins"/>
               </a:rPr>
               <a:t>2 - Classeur, feuilles et cellules</a:t>
             </a:r>
@@ -9905,9 +10228,7 @@
           <a:prstGeom prst="rect">
             <a:avLst/>
           </a:prstGeom>
-          <a:solidFill>
-            <a:srgbClr val="146B4A"/>
-          </a:solidFill>
+          <a:solidFill>val="007A55"/&gt;</a:solidFill>
           <a:ln>
             <a:noFill/>
           </a:ln>
@@ -9964,10 +10285,8 @@
             </a:pPr>
             <a:r>
               <a:rPr sz="1800">
-                <a:solidFill>
-                  <a:srgbClr val="FFFFFF"/>
-                </a:solidFill>
-                <a:latin typeface="Calibri"/>
+                <a:solidFill>val="FFFFFF"/&gt;</a:solidFill>
+                <a:latin typeface="Poppins"/>
               </a:rPr>
               <a:t>▪  Classeur = fichier Excel contenant plusieurs feuilles.</a:t>
             </a:r>
@@ -9980,10 +10299,8 @@
             </a:pPr>
             <a:r>
               <a:rPr sz="1800">
-                <a:solidFill>
-                  <a:srgbClr val="FFFFFF"/>
-                </a:solidFill>
-                <a:latin typeface="Calibri"/>
+                <a:solidFill>val="FFFFFF"/&gt;</a:solidFill>
+                <a:latin typeface="Poppins"/>
               </a:rPr>
               <a:t>▪  Cellule : intersection ligne/colonne (ex : B4).</a:t>
             </a:r>
@@ -9996,10 +10313,8 @@
             </a:pPr>
             <a:r>
               <a:rPr sz="1800">
-                <a:solidFill>
-                  <a:srgbClr val="FFFFFF"/>
-                </a:solidFill>
-                <a:latin typeface="Calibri"/>
+                <a:solidFill>val="FFFFFF"/&gt;</a:solidFill>
+                <a:latin typeface="Poppins"/>
               </a:rPr>
               <a:t>▪  Plage : ensemble continu de cellules (ex : A1:C10).</a:t>
             </a:r>
@@ -10012,10 +10327,8 @@
             </a:pPr>
             <a:r>
               <a:rPr sz="1800">
-                <a:solidFill>
-                  <a:srgbClr val="FFFFFF"/>
-                </a:solidFill>
-                <a:latin typeface="Calibri"/>
+                <a:solidFill>val="FFFFFF"/&gt;</a:solidFill>
+                <a:latin typeface="Poppins"/>
               </a:rPr>
               <a:t>▪  Types de contenu : nombres, textes, dates, formules.</a:t>
             </a:r>
@@ -10028,10 +10341,8 @@
             </a:pPr>
             <a:r>
               <a:rPr sz="1800">
-                <a:solidFill>
-                  <a:srgbClr val="FFFFFF"/>
-                </a:solidFill>
-                <a:latin typeface="Calibri"/>
+                <a:solidFill>val="FFFFFF"/&gt;</a:solidFill>
+                <a:latin typeface="Poppins"/>
               </a:rPr>
               <a:t>▪  Références relatives ($A$1) et absolues (A1).</a:t>
             </a:r>
@@ -10062,6 +10373,47 @@
           </a:prstGeom>
         </p:spPr>
       </p:pic>
+      <p:sp>
+        <p:nvSpPr>
+          <p:cNvPr id="990001" name="Pied de page FLE"/>
+          <p:cNvSpPr>
+            <a:spLocks noGrp="1"/>
+          </p:cNvSpPr>
+          <p:nvPr/>
+        </p:nvSpPr>
+        <p:spPr>
+          <a:xfrm>
+            <a:off x="4343400" y="-329184"/>
+            <a:ext cx="4572000" cy="274320"/>
+          </a:xfrm>
+          <a:prstGeom prst="rect">
+            <a:avLst/>
+          </a:prstGeom>
+        </p:spPr>
+        <p:txBody>
+          <a:bodyPr anchor="b"/>
+          <a:lstStyle/>
+          <a:p>
+            <a:pPr algn="r">
+              <a:defRPr sz="900">
+                <a:solidFill>
+                  <a:srgbClr val="9AA7B6"/>
+                </a:solidFill>
+                <a:latin typeface="Poppins"/>
+              </a:defRPr>
+            </a:pPr>
+            <a:r>
+              <a:rPr lang="fr-FR" sz="900">
+                <a:solidFill>
+                  <a:srgbClr val="9AA7B6"/>
+                </a:solidFill>
+                <a:latin typeface="Poppins"/>
+              </a:rPr>
+              <a:t>Université de Mostaganem — Dr. Madani BELACEL</a:t>
+            </a:r>
+          </a:p>
+        </p:txBody>
+      </p:sp>
     </p:spTree>
   </p:cSld>
   <p:clrMapOvr>
@@ -10075,9 +10427,7 @@
   <p:cSld>
     <p:bg>
       <p:bgPr>
-        <a:solidFill>
-          <a:srgbClr val="0B3D2E"/>
-        </a:solidFill>
+        <a:solidFill>val="004A38"/&gt;</a:solidFill>
         <a:effectLst/>
       </p:bgPr>
     </p:bg>
@@ -10102,9 +10452,7 @@
           <a:prstGeom prst="rect">
             <a:avLst/>
           </a:prstGeom>
-          <a:solidFill>
-            <a:srgbClr val="146B4A"/>
-          </a:solidFill>
+          <a:solidFill>val="007A55"/&gt;</a:solidFill>
           <a:ln>
             <a:noFill/>
           </a:ln>
@@ -10146,9 +10494,7 @@
           <a:prstGeom prst="rect">
             <a:avLst/>
           </a:prstGeom>
-          <a:solidFill>
-            <a:srgbClr val="FFD700"/>
-          </a:solidFill>
+          <a:solidFill>val="F0B429"/&gt;</a:solidFill>
           <a:ln>
             <a:noFill/>
           </a:ln>
@@ -10190,9 +10536,7 @@
           <a:prstGeom prst="rect">
             <a:avLst/>
           </a:prstGeom>
-          <a:solidFill>
-            <a:srgbClr val="FFD700"/>
-          </a:solidFill>
+          <a:solidFill>val="F0B429"/&gt;</a:solidFill>
           <a:ln>
             <a:noFill/>
           </a:ln>
@@ -10234,9 +10578,7 @@
           <a:prstGeom prst="rect">
             <a:avLst/>
           </a:prstGeom>
-          <a:solidFill>
-            <a:srgbClr val="146B4A"/>
-          </a:solidFill>
+          <a:solidFill>val="007A55"/&gt;</a:solidFill>
           <a:ln>
             <a:noFill/>
           </a:ln>
@@ -10278,9 +10620,7 @@
           <a:prstGeom prst="rect">
             <a:avLst/>
           </a:prstGeom>
-          <a:solidFill>
-            <a:srgbClr val="146B4A"/>
-          </a:solidFill>
+          <a:solidFill>val="007A55"/&gt;</a:solidFill>
           <a:ln>
             <a:noFill/>
           </a:ln>
@@ -10333,10 +10673,8 @@
             <a:pPr algn="ctr"/>
             <a:r>
               <a:rPr sz="2200" b="1" i="0">
-                <a:solidFill>
-                  <a:srgbClr val="BBBBBB"/>
-                </a:solidFill>
-                <a:latin typeface="Calibri"/>
+                <a:solidFill>val="9AA7B6"/&gt;</a:solidFill>
+                <a:latin typeface="Poppins"/>
               </a:rPr>
               <a:t>Section 3</a:t>
             </a:r>
@@ -10368,10 +10706,8 @@
             <a:pPr algn="ctr"/>
             <a:r>
               <a:rPr sz="2800" b="1" i="0">
-                <a:solidFill>
-                  <a:srgbClr val="FFD700"/>
-                </a:solidFill>
-                <a:latin typeface="Calibri"/>
+                <a:solidFill>val="F0B429"/&gt;</a:solidFill>
+                <a:latin typeface="Poppins"/>
               </a:rPr>
               <a:t>Formules et fonctions</a:t>
             </a:r>
@@ -10402,6 +10738,47 @@
           </a:prstGeom>
         </p:spPr>
       </p:pic>
+      <p:sp>
+        <p:nvSpPr>
+          <p:cNvPr id="990001" name="Pied de page FLE"/>
+          <p:cNvSpPr>
+            <a:spLocks noGrp="1"/>
+          </p:cNvSpPr>
+          <p:nvPr/>
+        </p:nvSpPr>
+        <p:spPr>
+          <a:xfrm>
+            <a:off x="4343400" y="-329184"/>
+            <a:ext cx="4572000" cy="274320"/>
+          </a:xfrm>
+          <a:prstGeom prst="rect">
+            <a:avLst/>
+          </a:prstGeom>
+        </p:spPr>
+        <p:txBody>
+          <a:bodyPr anchor="b"/>
+          <a:lstStyle/>
+          <a:p>
+            <a:pPr algn="r">
+              <a:defRPr sz="900">
+                <a:solidFill>
+                  <a:srgbClr val="9AA7B6"/>
+                </a:solidFill>
+                <a:latin typeface="Poppins"/>
+              </a:defRPr>
+            </a:pPr>
+            <a:r>
+              <a:rPr lang="fr-FR" sz="900">
+                <a:solidFill>
+                  <a:srgbClr val="9AA7B6"/>
+                </a:solidFill>
+                <a:latin typeface="Poppins"/>
+              </a:rPr>
+              <a:t>Université de Mostaganem — Dr. Madani BELACEL</a:t>
+            </a:r>
+          </a:p>
+        </p:txBody>
+      </p:sp>
     </p:spTree>
   </p:cSld>
   <p:clrMapOvr>
@@ -10415,9 +10792,7 @@
   <p:cSld>
     <p:bg>
       <p:bgPr>
-        <a:solidFill>
-          <a:srgbClr val="0B3D2E"/>
-        </a:solidFill>
+        <a:solidFill>val="004A38"/&gt;</a:solidFill>
         <a:effectLst/>
       </p:bgPr>
     </p:bg>
@@ -10442,9 +10817,7 @@
           <a:prstGeom prst="rect">
             <a:avLst/>
           </a:prstGeom>
-          <a:solidFill>
-            <a:srgbClr val="146B4A"/>
-          </a:solidFill>
+          <a:solidFill>val="007A55"/&gt;</a:solidFill>
           <a:ln>
             <a:noFill/>
           </a:ln>
@@ -10486,9 +10859,7 @@
           <a:prstGeom prst="rect">
             <a:avLst/>
           </a:prstGeom>
-          <a:solidFill>
-            <a:srgbClr val="FFD700"/>
-          </a:solidFill>
+          <a:solidFill>val="F0B429"/&gt;</a:solidFill>
           <a:ln>
             <a:noFill/>
           </a:ln>
@@ -10530,9 +10901,7 @@
           <a:prstGeom prst="rect">
             <a:avLst/>
           </a:prstGeom>
-          <a:solidFill>
-            <a:srgbClr val="FFD700"/>
-          </a:solidFill>
+          <a:solidFill>val="F0B429"/&gt;</a:solidFill>
           <a:ln>
             <a:noFill/>
           </a:ln>
@@ -10574,9 +10943,7 @@
           <a:prstGeom prst="rect">
             <a:avLst/>
           </a:prstGeom>
-          <a:solidFill>
-            <a:srgbClr val="146B4A"/>
-          </a:solidFill>
+          <a:solidFill>val="007A55"/&gt;</a:solidFill>
           <a:ln>
             <a:noFill/>
           </a:ln>
@@ -10629,10 +10996,8 @@
             <a:pPr algn="l"/>
             <a:r>
               <a:rPr sz="2400" b="1" i="0">
-                <a:solidFill>
-                  <a:srgbClr val="FFD700"/>
-                </a:solidFill>
-                <a:latin typeface="Calibri"/>
+                <a:solidFill>val="F0B429"/&gt;</a:solidFill>
+                <a:latin typeface="Poppins"/>
               </a:rPr>
               <a:t>3 - Formules et fonctions</a:t>
             </a:r>
@@ -10653,9 +11018,7 @@
           <a:prstGeom prst="rect">
             <a:avLst/>
           </a:prstGeom>
-          <a:solidFill>
-            <a:srgbClr val="146B4A"/>
-          </a:solidFill>
+          <a:solidFill>val="007A55"/&gt;</a:solidFill>
           <a:ln>
             <a:noFill/>
           </a:ln>
@@ -10712,10 +11075,8 @@
             </a:pPr>
             <a:r>
               <a:rPr sz="1800">
-                <a:solidFill>
-                  <a:srgbClr val="FFFFFF"/>
-                </a:solidFill>
-                <a:latin typeface="Calibri"/>
+                <a:solidFill>val="FFFFFF"/&gt;</a:solidFill>
+                <a:latin typeface="Poppins"/>
               </a:rPr>
               <a:t>▪  Toute formule commence par le signe =.</a:t>
             </a:r>
@@ -10728,10 +11089,8 @@
             </a:pPr>
             <a:r>
               <a:rPr sz="1800">
-                <a:solidFill>
-                  <a:srgbClr val="FFFFFF"/>
-                </a:solidFill>
-                <a:latin typeface="Calibri"/>
+                <a:solidFill>val="FFFFFF"/&gt;</a:solidFill>
+                <a:latin typeface="Poppins"/>
               </a:rPr>
               <a:t>▪  Opérateurs : + - * / % ^ ; priorités de calcul.</a:t>
             </a:r>
@@ -10744,10 +11103,8 @@
             </a:pPr>
             <a:r>
               <a:rPr sz="1800">
-                <a:solidFill>
-                  <a:srgbClr val="FFFFFF"/>
-                </a:solidFill>
-                <a:latin typeface="Calibri"/>
+                <a:solidFill>val="FFFFFF"/&gt;</a:solidFill>
+                <a:latin typeface="Poppins"/>
               </a:rPr>
               <a:t>▪  Fonctions usuelles : SOMME, MOYENNE, MAX, MIN, NB.</a:t>
             </a:r>
@@ -10760,10 +11117,8 @@
             </a:pPr>
             <a:r>
               <a:rPr sz="1800">
-                <a:solidFill>
-                  <a:srgbClr val="FFFFFF"/>
-                </a:solidFill>
-                <a:latin typeface="Calibri"/>
+                <a:solidFill>val="FFFFFF"/&gt;</a:solidFill>
+                <a:latin typeface="Poppins"/>
               </a:rPr>
               <a:t>▪  Fonctions conditionnelles : SI, NB.SI, SOMME.SI.</a:t>
             </a:r>
@@ -10776,10 +11131,8 @@
             </a:pPr>
             <a:r>
               <a:rPr sz="1800">
-                <a:solidFill>
-                  <a:srgbClr val="FFFFFF"/>
-                </a:solidFill>
-                <a:latin typeface="Calibri"/>
+                <a:solidFill>val="FFFFFF"/&gt;</a:solidFill>
+                <a:latin typeface="Poppins"/>
               </a:rPr>
               <a:t>▪  Assistant fx : recherche des fonctions.</a:t>
             </a:r>
@@ -10810,6 +11163,47 @@
           </a:prstGeom>
         </p:spPr>
       </p:pic>
+      <p:sp>
+        <p:nvSpPr>
+          <p:cNvPr id="990001" name="Pied de page FLE"/>
+          <p:cNvSpPr>
+            <a:spLocks noGrp="1"/>
+          </p:cNvSpPr>
+          <p:nvPr/>
+        </p:nvSpPr>
+        <p:spPr>
+          <a:xfrm>
+            <a:off x="4343400" y="-329184"/>
+            <a:ext cx="4572000" cy="274320"/>
+          </a:xfrm>
+          <a:prstGeom prst="rect">
+            <a:avLst/>
+          </a:prstGeom>
+        </p:spPr>
+        <p:txBody>
+          <a:bodyPr anchor="b"/>
+          <a:lstStyle/>
+          <a:p>
+            <a:pPr algn="r">
+              <a:defRPr sz="900">
+                <a:solidFill>
+                  <a:srgbClr val="9AA7B6"/>
+                </a:solidFill>
+                <a:latin typeface="Poppins"/>
+              </a:defRPr>
+            </a:pPr>
+            <a:r>
+              <a:rPr lang="fr-FR" sz="900">
+                <a:solidFill>
+                  <a:srgbClr val="9AA7B6"/>
+                </a:solidFill>
+                <a:latin typeface="Poppins"/>
+              </a:rPr>
+              <a:t>Université de Mostaganem — Dr. Madani BELACEL</a:t>
+            </a:r>
+          </a:p>
+        </p:txBody>
+      </p:sp>
     </p:spTree>
   </p:cSld>
   <p:clrMapOvr>
@@ -10823,9 +11217,7 @@
   <p:cSld>
     <p:bg>
       <p:bgPr>
-        <a:solidFill>
-          <a:srgbClr val="0B3D2E"/>
-        </a:solidFill>
+        <a:solidFill>val="004A38"/&gt;</a:solidFill>
         <a:effectLst/>
       </p:bgPr>
     </p:bg>
@@ -10850,9 +11242,7 @@
           <a:prstGeom prst="rect">
             <a:avLst/>
           </a:prstGeom>
-          <a:solidFill>
-            <a:srgbClr val="146B4A"/>
-          </a:solidFill>
+          <a:solidFill>val="007A55"/&gt;</a:solidFill>
           <a:ln>
             <a:noFill/>
           </a:ln>
@@ -10894,9 +11284,7 @@
           <a:prstGeom prst="rect">
             <a:avLst/>
           </a:prstGeom>
-          <a:solidFill>
-            <a:srgbClr val="FFD700"/>
-          </a:solidFill>
+          <a:solidFill>val="F0B429"/&gt;</a:solidFill>
           <a:ln>
             <a:noFill/>
           </a:ln>
@@ -10938,9 +11326,7 @@
           <a:prstGeom prst="rect">
             <a:avLst/>
           </a:prstGeom>
-          <a:solidFill>
-            <a:srgbClr val="FFD700"/>
-          </a:solidFill>
+          <a:solidFill>val="F0B429"/&gt;</a:solidFill>
           <a:ln>
             <a:noFill/>
           </a:ln>
@@ -10982,9 +11368,7 @@
           <a:prstGeom prst="rect">
             <a:avLst/>
           </a:prstGeom>
-          <a:solidFill>
-            <a:srgbClr val="146B4A"/>
-          </a:solidFill>
+          <a:solidFill>val="007A55"/&gt;</a:solidFill>
           <a:ln>
             <a:noFill/>
           </a:ln>
@@ -11026,9 +11410,7 @@
           <a:prstGeom prst="rect">
             <a:avLst/>
           </a:prstGeom>
-          <a:solidFill>
-            <a:srgbClr val="146B4A"/>
-          </a:solidFill>
+          <a:solidFill>val="007A55"/&gt;</a:solidFill>
           <a:ln>
             <a:noFill/>
           </a:ln>
@@ -11081,10 +11463,8 @@
             <a:pPr algn="ctr"/>
             <a:r>
               <a:rPr sz="2200" b="1" i="0">
-                <a:solidFill>
-                  <a:srgbClr val="BBBBBB"/>
-                </a:solidFill>
-                <a:latin typeface="Calibri"/>
+                <a:solidFill>val="9AA7B6"/&gt;</a:solidFill>
+                <a:latin typeface="Poppins"/>
               </a:rPr>
               <a:t>Section 4</a:t>
             </a:r>
@@ -11116,10 +11496,8 @@
             <a:pPr algn="ctr"/>
             <a:r>
               <a:rPr sz="2800" b="1" i="0">
-                <a:solidFill>
-                  <a:srgbClr val="FFD700"/>
-                </a:solidFill>
-                <a:latin typeface="Calibri"/>
+                <a:solidFill>val="F0B429"/&gt;</a:solidFill>
+                <a:latin typeface="Poppins"/>
               </a:rPr>
               <a:t>Mise en forme et tableaux</a:t>
             </a:r>
@@ -11150,6 +11528,47 @@
           </a:prstGeom>
         </p:spPr>
       </p:pic>
+      <p:sp>
+        <p:nvSpPr>
+          <p:cNvPr id="990001" name="Pied de page FLE"/>
+          <p:cNvSpPr>
+            <a:spLocks noGrp="1"/>
+          </p:cNvSpPr>
+          <p:nvPr/>
+        </p:nvSpPr>
+        <p:spPr>
+          <a:xfrm>
+            <a:off x="4343400" y="-329184"/>
+            <a:ext cx="4572000" cy="274320"/>
+          </a:xfrm>
+          <a:prstGeom prst="rect">
+            <a:avLst/>
+          </a:prstGeom>
+        </p:spPr>
+        <p:txBody>
+          <a:bodyPr anchor="b"/>
+          <a:lstStyle/>
+          <a:p>
+            <a:pPr algn="r">
+              <a:defRPr sz="900">
+                <a:solidFill>
+                  <a:srgbClr val="9AA7B6"/>
+                </a:solidFill>
+                <a:latin typeface="Poppins"/>
+              </a:defRPr>
+            </a:pPr>
+            <a:r>
+              <a:rPr lang="fr-FR" sz="900">
+                <a:solidFill>
+                  <a:srgbClr val="9AA7B6"/>
+                </a:solidFill>
+                <a:latin typeface="Poppins"/>
+              </a:rPr>
+              <a:t>Université de Mostaganem — Dr. Madani BELACEL</a:t>
+            </a:r>
+          </a:p>
+        </p:txBody>
+      </p:sp>
     </p:spTree>
   </p:cSld>
   <p:clrMapOvr>
@@ -11201,7 +11620,7 @@
     </a:clrScheme>
     <a:fontScheme name="Office">
       <a:majorFont>
-        <a:latin typeface="Calibri"/>
+        <a:latin typeface="Poppins"/>
         <a:ea typeface=""/>
         <a:cs typeface=""/>
         <a:font script="Jpan" typeface="ＭＳ Ｐゴシック"/>
@@ -11236,7 +11655,7 @@
         <a:font script="Geor" typeface="Sylfaen"/>
       </a:majorFont>
       <a:minorFont>
-        <a:latin typeface="Calibri"/>
+        <a:latin typeface="Poppins"/>
         <a:ea typeface=""/>
         <a:cs typeface=""/>
         <a:font script="Jpan" typeface="ＭＳ Ｐゴシック"/>
